--- a/materiales/actividad-1/tema-03-objetos-estados-v4.pptx
+++ b/materiales/actividad-1/tema-03-objetos-estados-v4.pptx
@@ -11711,28 +11711,7 @@
             <a:spAutoFit/>
           </a:bodyPr>
           <a:lstStyle/>
-          <a:p>
-            <a:pPr algn="ctr">
-              <a:lnSpc>
-                <a:spcPct val="100000"/>
-              </a:lnSpc>
-              <a:spcBef>
-                <a:spcPts val="0"/>
-              </a:spcBef>
-              <a:spcAft>
-                <a:spcPts val="0"/>
-              </a:spcAft>
-            </a:pPr>
-            <a:r>
-              <a:rPr sz="1150" b="1" i="0">
-                <a:solidFill>
-                  <a:srgbClr val="1D4696"/>
-                </a:solidFill>
-                <a:latin typeface="Calibri"/>
-              </a:rPr>
-              <a:t>FOTOGRAFÍA DEL GRUPO</a:t>
-            </a:r>
-          </a:p>
+          <a:p/>
         </p:txBody>
       </p:sp>
       <p:sp>
@@ -12217,6 +12196,30 @@
           </a:p>
         </p:txBody>
       </p:sp>
+      <p:pic>
+        <p:nvPicPr>
+          <p:cNvPr id="21" name="Picture 20" descr="foto-grupal.jpeg"/>
+          <p:cNvPicPr>
+            <a:picLocks noChangeAspect="1"/>
+          </p:cNvPicPr>
+          <p:nvPr/>
+        </p:nvPicPr>
+        <p:blipFill>
+          <a:blip r:embed="rId2"/>
+          <a:stretch>
+            <a:fillRect/>
+          </a:stretch>
+        </p:blipFill>
+        <p:spPr>
+          <a:xfrm>
+            <a:off x="5239512" y="2148840"/>
+            <a:ext cx="1810512" cy="1357884"/>
+          </a:xfrm>
+          <a:prstGeom prst="rect">
+            <a:avLst/>
+          </a:prstGeom>
+        </p:spPr>
+      </p:pic>
     </p:spTree>
   </p:cSld>
   <p:clrMapOvr>
@@ -13929,7 +13932,7 @@
                 </a:solidFill>
                 <a:latin typeface="Calibri"/>
               </a:rPr>
-              <a:t>Los identificadores y fechas ilustran la notación; no son datos personales ni registros de la UPEA.</a:t>
+              <a:t>Los identificadores y fechas ilustran la notación; no son datos personales ni registros institucionales.</a:t>
             </a:r>
           </a:p>
         </p:txBody>
@@ -13975,7 +13978,7 @@
                 </a:solidFill>
                 <a:latin typeface="Calibri"/>
               </a:rPr>
-              <a:t>Fuente: </a:t>
+              <a:t>Fuente: OMG, UML 2.5.1 · escena ilustrativa relacionada con la consulta del catálogo UPDS</a:t>
             </a:r>
             <a:r>
               <a:rPr sz="760" b="0" i="0">
@@ -13984,7 +13987,7 @@
                 </a:solidFill>
                 <a:latin typeface="Calibri"/>
               </a:rPr>
-              <a:t>OMG, UML 2.5.1 · relación conceptual con el caso bibliotecario UPEA  ·  as of 6 de octubre de 2026</a:t>
+              <a:t/>
             </a:r>
           </a:p>
         </p:txBody>
@@ -14174,7 +14177,7 @@
                 </a:solidFill>
                 <a:latin typeface="Calibri"/>
               </a:rPr>
-              <a:t>CICLO PROPUESTO PARA UNA COPIA DENTRO DE UNA OPERACIÓN BIBLIOTECARIA</a:t>
+              <a:t>FLUJO ANALÍTICO DE CONSULTA DE UNA FICHA PÚBLICA</a:t>
             </a:r>
           </a:p>
         </p:txBody>
@@ -14254,7 +14257,8 @@
                 </a:solidFill>
                 <a:latin typeface="Calibri"/>
               </a:rPr>
-              <a:t>Disponible</a:t>
+              <a:t>Resultados
+coincidencias</a:t>
             </a:r>
           </a:p>
           <a:p>
@@ -14276,7 +14280,7 @@
                 </a:solidFill>
                 <a:latin typeface="Calibri"/>
               </a:rPr>
-              <a:t>puede asignarse</a:t>
+              <a:t/>
             </a:r>
           </a:p>
         </p:txBody>
@@ -14356,7 +14360,8 @@
                 </a:solidFill>
                 <a:latin typeface="Calibri"/>
               </a:rPr>
-              <a:t>Reservado</a:t>
+              <a:t>Ficha
+registro abierto</a:t>
             </a:r>
           </a:p>
           <a:p>
@@ -14378,7 +14383,7 @@
                 </a:solidFill>
                 <a:latin typeface="Calibri"/>
               </a:rPr>
-              <a:t>solicitud vigente</a:t>
+              <a:t/>
             </a:r>
           </a:p>
         </p:txBody>
@@ -14458,7 +14463,8 @@
                 </a:solidFill>
                 <a:latin typeface="Calibri"/>
               </a:rPr>
-              <a:t>Prestado</a:t>
+              <a:t>Ejemplares
+datos consultables</a:t>
             </a:r>
           </a:p>
           <a:p>
@@ -14480,7 +14486,7 @@
                 </a:solidFill>
                 <a:latin typeface="Calibri"/>
               </a:rPr>
-              <a:t>préstamo activo</a:t>
+              <a:t/>
             </a:r>
           </a:p>
         </p:txBody>
@@ -14560,7 +14566,8 @@
                 </a:solidFill>
                 <a:latin typeface="Calibri"/>
               </a:rPr>
-              <a:t>Disponible</a:t>
+              <a:t>Reserva
+opción disponible</a:t>
             </a:r>
           </a:p>
           <a:p>
@@ -14582,7 +14589,7 @@
                 </a:solidFill>
                 <a:latin typeface="Calibri"/>
               </a:rPr>
-              <a:t>devolución cerrada</a:t>
+              <a:t/>
             </a:r>
           </a:p>
         </p:txBody>
@@ -14697,7 +14704,7 @@
                 </a:solidFill>
                 <a:latin typeface="Calibri"/>
               </a:rPr>
-              <a:t>registrar reserva</a:t>
+              <a:t>abrir ficha</a:t>
             </a:r>
           </a:p>
         </p:txBody>
@@ -14743,7 +14750,7 @@
                 </a:solidFill>
                 <a:latin typeface="Calibri"/>
               </a:rPr>
-              <a:t>confirmar retiro</a:t>
+              <a:t>revisar ejemplares</a:t>
             </a:r>
           </a:p>
         </p:txBody>
@@ -14789,7 +14796,7 @@
                 </a:solidFill>
                 <a:latin typeface="Calibri"/>
               </a:rPr>
-              <a:t>registrar devolución</a:t>
+              <a:t>iniciar reserva</a:t>
             </a:r>
           </a:p>
         </p:txBody>
@@ -14915,7 +14922,7 @@
                 </a:solidFill>
                 <a:latin typeface="Calibri"/>
               </a:rPr>
-              <a:t>La secuencia representa un ciclo de análisis; la política real de reservas y vencimientos debe confirmarse con la biblioteca.</a:t>
+              <a:t>El flujo representa las interacciones visibles; la gestión interna de reservas no se deduce de la página pública.</a:t>
             </a:r>
           </a:p>
         </p:txBody>
@@ -14961,7 +14968,7 @@
                 </a:solidFill>
                 <a:latin typeface="Calibri"/>
               </a:rPr>
-              <a:t>Fuente: </a:t>
+              <a:t>Fuente: OMG, UML 2.5.1, cláusula 14 · consulta de fichas, ejemplares y reserva visible en el catálogo público UPDS  ·  as of 6 de octubre de 2026</a:t>
             </a:r>
             <a:r>
               <a:rPr sz="760" b="0" i="0">
@@ -14970,7 +14977,7 @@
                 </a:solidFill>
                 <a:latin typeface="Calibri"/>
               </a:rPr>
-              <a:t>OMG, UML 2.5.1, cláusula 14 · funciones de préstamo y reserva documentadas por UPEA  ·  as of 6 de octubre de 2026</a:t>
+              <a:t/>
             </a:r>
           </a:p>
         </p:txBody>
@@ -16167,7 +16174,7 @@
                 </a:solidFill>
                 <a:latin typeface="Calibri Light"/>
               </a:rPr>
-              <a:t>Las funciones UPEA sustentan el escenario bibliotecario</a:t>
+              <a:t>La consulta pública del catálogo UPDS sustenta este escenario</a:t>
             </a:r>
           </a:p>
         </p:txBody>
@@ -16213,7 +16220,7 @@
                 </a:solidFill>
                 <a:latin typeface="Calibri"/>
               </a:rPr>
-              <a:t>05 · CASO UPEA</a:t>
+              <a:t>05 · CASO REAL · UPDS</a:t>
             </a:r>
           </a:p>
         </p:txBody>
@@ -16259,7 +16266,7 @@
                 </a:solidFill>
                 <a:latin typeface="Calibri"/>
               </a:rPr>
-              <a:t>LA FICHA INSTITUCIONAL DESCRIBE PRÉSTAMOS, RESERVAS REMOTAS, REPORTES Y ESTADÍSTICAS</a:t>
+              <a:t>VISTAS PÚBLICAS DEL CATÁLOGO Y UN FLUJO ANALÍTICO</a:t>
             </a:r>
           </a:p>
         </p:txBody>
@@ -16339,7 +16346,8 @@
                 </a:solidFill>
                 <a:latin typeface="Calibri"/>
               </a:rPr>
-              <a:t>Sistema web</a:t>
+              <a:t>Catálogo público
+Biblioteca UPDS</a:t>
             </a:r>
           </a:p>
           <a:p>
@@ -16361,7 +16369,7 @@
                 </a:solidFill>
                 <a:latin typeface="Calibri"/>
               </a:rPr>
-              <a:t>Biblioteca Central UPEA · 2013</a:t>
+              <a:t/>
             </a:r>
           </a:p>
         </p:txBody>
@@ -16463,7 +16471,8 @@
                 </a:solidFill>
                 <a:latin typeface="Calibri"/>
               </a:rPr>
-              <a:t>Préstamo registrado</a:t>
+              <a:t>Registro encontrado
+visible</a:t>
             </a:r>
           </a:p>
           <a:p>
@@ -16485,7 +16494,7 @@
                 </a:solidFill>
                 <a:latin typeface="Calibri"/>
               </a:rPr>
-              <a:t>función declarada</a:t>
+              <a:t/>
             </a:r>
           </a:p>
         </p:txBody>
@@ -16587,7 +16596,8 @@
                 </a:solidFill>
                 <a:latin typeface="Calibri"/>
               </a:rPr>
-              <a:t>Reserva solicitada</a:t>
+              <a:t>Ficha consultada
+visible</a:t>
             </a:r>
           </a:p>
           <a:p>
@@ -16609,7 +16619,7 @@
                 </a:solidFill>
                 <a:latin typeface="Calibri"/>
               </a:rPr>
-              <a:t>función declarada</a:t>
+              <a:t/>
             </a:r>
           </a:p>
         </p:txBody>
@@ -16711,7 +16721,8 @@
                 </a:solidFill>
                 <a:latin typeface="Calibri"/>
               </a:rPr>
-              <a:t>Reporte emitido</a:t>
+              <a:t>Ejemplares revisados
+visible</a:t>
             </a:r>
           </a:p>
           <a:p>
@@ -16733,7 +16744,7 @@
                 </a:solidFill>
                 <a:latin typeface="Calibri"/>
               </a:rPr>
-              <a:t>función declarada</a:t>
+              <a:t/>
             </a:r>
           </a:p>
         </p:txBody>
@@ -16835,7 +16846,8 @@
                 </a:solidFill>
                 <a:latin typeface="Calibri"/>
               </a:rPr>
-              <a:t>Estadística consultada</a:t>
+              <a:t>Reserva iniciada
+opción visible</a:t>
             </a:r>
           </a:p>
           <a:p>
@@ -16857,7 +16869,7 @@
                 </a:solidFill>
                 <a:latin typeface="Calibri"/>
               </a:rPr>
-              <a:t>función declarada</a:t>
+              <a:t/>
             </a:r>
           </a:p>
         </p:txBody>
@@ -16903,7 +16915,7 @@
                 </a:solidFill>
                 <a:latin typeface="Calibri"/>
               </a:rPr>
-              <a:t>La ficha reporta UWE/UML, PHP y PostgreSQL; no publica en el resumen los estados internos del ejemplar.</a:t>
+              <a:t>El catálogo muestra fichas, ejemplares y disponibilidad consultable; sus estados internos y reglas de reserva no son públicos.</a:t>
             </a:r>
           </a:p>
         </p:txBody>
@@ -16951,7 +16963,7 @@
                 </a:solidFill>
                 <a:latin typeface="Calibri"/>
               </a:rPr>
-              <a:t>Abrir registro institucional UPEA ↗</a:t>
+              <a:t>Abrir catálogo público UPDS ↗</a:t>
             </a:r>
           </a:p>
         </p:txBody>
@@ -16997,7 +17009,7 @@
                 </a:solidFill>
                 <a:latin typeface="Calibri"/>
               </a:rPr>
-              <a:t>Fuente: </a:t>
+              <a:t>Fuente: Catálogo público de Biblioteca UPDS · consulta de registros y ejemplares</a:t>
             </a:r>
             <a:r>
               <a:rPr sz="760" b="0" i="0">
@@ -17006,7 +17018,7 @@
                 </a:solidFill>
                 <a:latin typeface="Calibri"/>
               </a:rPr>
-              <a:t>Tintaya Villavicencio, R. (2013). Repositorio Institucional UPEA, PG-0015  ·  as of 6 de octubre de 2026</a:t>
+              <a:t/>
             </a:r>
           </a:p>
         </p:txBody>
@@ -17276,7 +17288,7 @@
                 </a:solidFill>
                 <a:latin typeface="Calibri"/>
               </a:rPr>
-              <a:t>DOCUMENTADO EN LA FICHA</a:t>
+              <a:t>VISIBLE EN EL CATÁLOGO</a:t>
             </a:r>
           </a:p>
         </p:txBody>
@@ -17322,7 +17334,9 @@
                 </a:solidFill>
                 <a:latin typeface="Calibri"/>
               </a:rPr>
-              <a:t>Préstamos · reservas sin límite geográfico</a:t>
+              <a:t>Registros bibliográficos consultables
+Ejemplares y disponibilidad visible
+Opción de reserva en determinados registros</a:t>
             </a:r>
           </a:p>
           <a:p>
@@ -17344,7 +17358,7 @@
                 </a:solidFill>
                 <a:latin typeface="Calibri"/>
               </a:rPr>
-              <a:t>Reportes · estadísticas</a:t>
+              <a:t/>
             </a:r>
           </a:p>
           <a:p>
@@ -17366,7 +17380,7 @@
                 </a:solidFill>
                 <a:latin typeface="Calibri"/>
               </a:rPr>
-              <a:t>UWE/UML · PHP · PostgreSQL</a:t>
+              <a:t/>
             </a:r>
           </a:p>
         </p:txBody>
@@ -17492,7 +17506,9 @@
                 </a:solidFill>
                 <a:latin typeface="Calibri"/>
               </a:rPr>
-              <a:t>Disponible → Reservado → Prestado</a:t>
+              <a:t>Resultados → ficha → ejemplares
+Disponibilidad consultada
+Opción de reserva visible</a:t>
             </a:r>
           </a:p>
           <a:p>
@@ -17514,7 +17530,7 @@
                 </a:solidFill>
                 <a:latin typeface="Calibri"/>
               </a:rPr>
-              <a:t>Evento de devolución</a:t>
+              <a:t/>
             </a:r>
           </a:p>
           <a:p>
@@ -17536,7 +17552,7 @@
                 </a:solidFill>
                 <a:latin typeface="Calibri"/>
               </a:rPr>
-              <a:t>Guarda de correspondencia del ejemplar</a:t>
+              <a:t/>
             </a:r>
           </a:p>
         </p:txBody>
@@ -17582,7 +17598,7 @@
                 </a:solidFill>
                 <a:latin typeface="Calibri"/>
               </a:rPr>
-              <a:t>Los diagramas desarrollan una interpretación del dominio bibliotecario; no atribuyen estados internos ni transiciones a la tesis sin evidencia publicada.</a:t>
+              <a:t>El flujo modela lo visible desde la página pública; no atribuye estados ni reglas internas de reserva a UPDS.</a:t>
             </a:r>
           </a:p>
         </p:txBody>
@@ -17628,7 +17644,7 @@
                 </a:solidFill>
                 <a:latin typeface="Calibri"/>
               </a:rPr>
-              <a:t>Fuente: </a:t>
+              <a:t>Fuente: Catálogo público de Biblioteca UPDS · estados analíticos propuestos</a:t>
             </a:r>
             <a:r>
               <a:rPr sz="760" b="0" i="0">
@@ -17637,7 +17653,7 @@
                 </a:solidFill>
                 <a:latin typeface="Calibri"/>
               </a:rPr>
-              <a:t>Repositorio Institucional UPEA · lectura crítica del registro de grado  ·  as of 6 de octubre de 2026</a:t>
+              <a:t/>
             </a:r>
           </a:p>
         </p:txBody>

--- a/materiales/actividad-1/tema-03-objetos-estados-v4.pptx
+++ b/materiales/actividad-1/tema-03-objetos-estados-v4.pptx
@@ -11801,7 +11801,7 @@
                 </a:solidFill>
                 <a:latin typeface="Calibri"/>
               </a:rPr>
-              <a:t>INTEGRANTE 1</a:t>
+              <a:t>Ashley Aguilar Perez</a:t>
             </a:r>
           </a:p>
         </p:txBody>
@@ -11879,7 +11879,7 @@
                 </a:solidFill>
                 <a:latin typeface="Calibri"/>
               </a:rPr>
-              <a:t>INTEGRANTE 2</a:t>
+              <a:t>Nicolas Soria Yabeta</a:t>
             </a:r>
           </a:p>
         </p:txBody>
@@ -11957,7 +11957,7 @@
                 </a:solidFill>
                 <a:latin typeface="Calibri"/>
               </a:rPr>
-              <a:t>INTEGRANTE 3</a:t>
+              <a:t>Erick Bravo Borges</a:t>
             </a:r>
           </a:p>
         </p:txBody>
@@ -12035,7 +12035,7 @@
                 </a:solidFill>
                 <a:latin typeface="Calibri"/>
               </a:rPr>
-              <a:t>INTEGRANTE 4</a:t>
+              <a:t>Jose Manuel Callecusi Guarachi</a:t>
             </a:r>
           </a:p>
         </p:txBody>
@@ -12113,7 +12113,7 @@
                 </a:solidFill>
                 <a:latin typeface="Calibri"/>
               </a:rPr>
-              <a:t>INTEGRANTE 5</a:t>
+              <a:t>Ruben Churqui Limachi</a:t>
             </a:r>
           </a:p>
         </p:txBody>

--- a/materiales/actividad-1/tema-03-objetos-estados-v4.pptx
+++ b/materiales/actividad-1/tema-03-objetos-estados-v4.pptx
@@ -11808,38 +11808,6 @@
       </p:sp>
       <p:sp>
         <p:nvSpPr>
-          <p:cNvPr id="11" name="Rectangle 10"/>
-          <p:cNvSpPr/>
-          <p:nvPr/>
-        </p:nvSpPr>
-        <p:spPr>
-          <a:xfrm>
-            <a:off x="3703320" y="4151376"/>
-            <a:ext cx="2267712" cy="201168"/>
-          </a:xfrm>
-          <a:prstGeom prst="rect">
-            <a:avLst/>
-          </a:prstGeom>
-          <a:solidFill>
-            <a:srgbClr val="FFFFFF"/>
-          </a:solidFill>
-          <a:ln w="8890">
-            <a:solidFill>
-              <a:srgbClr val="B8C9D9"/>
-            </a:solidFill>
-          </a:ln>
-          <a:effectLst/>
-        </p:spPr>
-        <p:txBody>
-          <a:bodyPr rtlCol="0" anchor="ctr"/>
-          <a:lstStyle/>
-          <a:p>
-            <a:pPr algn="ctr"/>
-          </a:p>
-        </p:txBody>
-      </p:sp>
-      <p:sp>
-        <p:nvSpPr>
           <p:cNvPr id="12" name="TextBox 11"/>
           <p:cNvSpPr txBox="1"/>
           <p:nvPr/>
@@ -11886,38 +11854,6 @@
       </p:sp>
       <p:sp>
         <p:nvSpPr>
-          <p:cNvPr id="13" name="Rectangle 12"/>
-          <p:cNvSpPr/>
-          <p:nvPr/>
-        </p:nvSpPr>
-        <p:spPr>
-          <a:xfrm>
-            <a:off x="6190488" y="4151376"/>
-            <a:ext cx="2267712" cy="201168"/>
-          </a:xfrm>
-          <a:prstGeom prst="rect">
-            <a:avLst/>
-          </a:prstGeom>
-          <a:solidFill>
-            <a:srgbClr val="FFFFFF"/>
-          </a:solidFill>
-          <a:ln w="8890">
-            <a:solidFill>
-              <a:srgbClr val="B8C9D9"/>
-            </a:solidFill>
-          </a:ln>
-          <a:effectLst/>
-        </p:spPr>
-        <p:txBody>
-          <a:bodyPr rtlCol="0" anchor="ctr"/>
-          <a:lstStyle/>
-          <a:p>
-            <a:pPr algn="ctr"/>
-          </a:p>
-        </p:txBody>
-      </p:sp>
-      <p:sp>
-        <p:nvSpPr>
           <p:cNvPr id="14" name="TextBox 13"/>
           <p:cNvSpPr txBox="1"/>
           <p:nvPr/>
@@ -11964,38 +11900,6 @@
       </p:sp>
       <p:sp>
         <p:nvSpPr>
-          <p:cNvPr id="15" name="Rectangle 14"/>
-          <p:cNvSpPr/>
-          <p:nvPr/>
-        </p:nvSpPr>
-        <p:spPr>
-          <a:xfrm>
-            <a:off x="3703320" y="4718304"/>
-            <a:ext cx="2267712" cy="201168"/>
-          </a:xfrm>
-          <a:prstGeom prst="rect">
-            <a:avLst/>
-          </a:prstGeom>
-          <a:solidFill>
-            <a:srgbClr val="FFFFFF"/>
-          </a:solidFill>
-          <a:ln w="8890">
-            <a:solidFill>
-              <a:srgbClr val="B8C9D9"/>
-            </a:solidFill>
-          </a:ln>
-          <a:effectLst/>
-        </p:spPr>
-        <p:txBody>
-          <a:bodyPr rtlCol="0" anchor="ctr"/>
-          <a:lstStyle/>
-          <a:p>
-            <a:pPr algn="ctr"/>
-          </a:p>
-        </p:txBody>
-      </p:sp>
-      <p:sp>
-        <p:nvSpPr>
           <p:cNvPr id="16" name="TextBox 15"/>
           <p:cNvSpPr txBox="1"/>
           <p:nvPr/>
@@ -12042,38 +11946,6 @@
       </p:sp>
       <p:sp>
         <p:nvSpPr>
-          <p:cNvPr id="17" name="Rectangle 16"/>
-          <p:cNvSpPr/>
-          <p:nvPr/>
-        </p:nvSpPr>
-        <p:spPr>
-          <a:xfrm>
-            <a:off x="6190488" y="4718304"/>
-            <a:ext cx="2267712" cy="201168"/>
-          </a:xfrm>
-          <a:prstGeom prst="rect">
-            <a:avLst/>
-          </a:prstGeom>
-          <a:solidFill>
-            <a:srgbClr val="FFFFFF"/>
-          </a:solidFill>
-          <a:ln w="8890">
-            <a:solidFill>
-              <a:srgbClr val="B8C9D9"/>
-            </a:solidFill>
-          </a:ln>
-          <a:effectLst/>
-        </p:spPr>
-        <p:txBody>
-          <a:bodyPr rtlCol="0" anchor="ctr"/>
-          <a:lstStyle/>
-          <a:p>
-            <a:pPr algn="ctr"/>
-          </a:p>
-        </p:txBody>
-      </p:sp>
-      <p:sp>
-        <p:nvSpPr>
           <p:cNvPr id="18" name="TextBox 17"/>
           <p:cNvSpPr txBox="1"/>
           <p:nvPr/>
@@ -12120,38 +11992,6 @@
       </p:sp>
       <p:sp>
         <p:nvSpPr>
-          <p:cNvPr id="19" name="Rectangle 18"/>
-          <p:cNvSpPr/>
-          <p:nvPr/>
-        </p:nvSpPr>
-        <p:spPr>
-          <a:xfrm>
-            <a:off x="3703320" y="5285232"/>
-            <a:ext cx="2267712" cy="201168"/>
-          </a:xfrm>
-          <a:prstGeom prst="rect">
-            <a:avLst/>
-          </a:prstGeom>
-          <a:solidFill>
-            <a:srgbClr val="FFFFFF"/>
-          </a:solidFill>
-          <a:ln w="8890">
-            <a:solidFill>
-              <a:srgbClr val="B8C9D9"/>
-            </a:solidFill>
-          </a:ln>
-          <a:effectLst/>
-        </p:spPr>
-        <p:txBody>
-          <a:bodyPr rtlCol="0" anchor="ctr"/>
-          <a:lstStyle/>
-          <a:p>
-            <a:pPr algn="ctr"/>
-          </a:p>
-        </p:txBody>
-      </p:sp>
-      <p:sp>
-        <p:nvSpPr>
           <p:cNvPr id="20" name="TextBox 19"/>
           <p:cNvSpPr txBox="1"/>
           <p:nvPr/>
@@ -12193,6 +12033,110 @@
               </a:rPr>
               <a:t>Universidad Privada Domingo Savio</a:t>
             </a:r>
+          </a:p>
+        </p:txBody>
+      </p:sp>
+      <p:sp>
+        <p:nvSpPr>
+          <p:cNvPr id="22" name="Rounded Rectangle 21"/>
+          <p:cNvSpPr/>
+          <p:nvPr/>
+        </p:nvSpPr>
+        <p:spPr>
+          <a:gradFill rotWithShape="1">
+            <a:gsLst>
+              <a:gs pos="0">
+                <a:srgbClr val="16B9B0"/>
+              </a:gs>
+              <a:gs pos="42000">
+                <a:srgbClr val="F5C66A"/>
+              </a:gs>
+              <a:gs pos="72000">
+                <a:srgbClr val="6D7BF7"/>
+              </a:gs>
+              <a:gs pos="100000">
+                <a:srgbClr val="16B9B0"/>
+              </a:gs>
+            </a:gsLst>
+            <a:lin ang="2700000" scaled="1"/>
+          </a:gradFill>
+          <a:xfrm>
+            <a:off x="5230368" y="2084831"/>
+            <a:ext cx="1828800" cy="1426464"/>
+          </a:xfrm>
+          <a:prstGeom prst="roundRect">
+            <a:avLst/>
+          </a:prstGeom>
+          <a:ln w="13970">
+            <a:solidFill>
+              <a:srgbClr val="FFFFFF"/>
+            </a:solidFill>
+          </a:ln>
+        </p:spPr>
+        <p:style>
+          <a:lnRef idx="1">
+            <a:schemeClr val="accent1"/>
+          </a:lnRef>
+          <a:fillRef idx="3">
+            <a:schemeClr val="accent1"/>
+          </a:fillRef>
+          <a:effectRef idx="2">
+            <a:schemeClr val="accent1"/>
+          </a:effectRef>
+          <a:fontRef idx="minor">
+            <a:schemeClr val="lt1"/>
+          </a:fontRef>
+        </p:style>
+        <p:txBody>
+          <a:bodyPr rtlCol="0" anchor="ctr"/>
+          <a:lstStyle/>
+          <a:p>
+            <a:pPr algn="ctr"/>
+          </a:p>
+        </p:txBody>
+      </p:sp>
+      <p:sp>
+        <p:nvSpPr>
+          <p:cNvPr id="23" name="Rounded Rectangle 22"/>
+          <p:cNvSpPr/>
+          <p:nvPr/>
+        </p:nvSpPr>
+        <p:spPr>
+          <a:xfrm>
+            <a:off x="5253228" y="2107692"/>
+            <a:ext cx="1783080" cy="1380744"/>
+          </a:xfrm>
+          <a:prstGeom prst="roundRect">
+            <a:avLst/>
+          </a:prstGeom>
+          <a:solidFill>
+            <a:srgbClr val="F8FAFC"/>
+          </a:solidFill>
+          <a:ln w="10160">
+            <a:solidFill>
+              <a:srgbClr val="FFFFFF"/>
+            </a:solidFill>
+          </a:ln>
+        </p:spPr>
+        <p:style>
+          <a:lnRef idx="1">
+            <a:schemeClr val="accent1"/>
+          </a:lnRef>
+          <a:fillRef idx="3">
+            <a:schemeClr val="accent1"/>
+          </a:fillRef>
+          <a:effectRef idx="2">
+            <a:schemeClr val="accent1"/>
+          </a:effectRef>
+          <a:fontRef idx="minor">
+            <a:schemeClr val="lt1"/>
+          </a:fontRef>
+        </p:style>
+        <p:txBody>
+          <a:bodyPr rtlCol="0" anchor="ctr"/>
+          <a:lstStyle/>
+          <a:p>
+            <a:pPr algn="ctr"/>
           </a:p>
         </p:txBody>
       </p:sp>
@@ -12212,8 +12156,8 @@
         </p:blipFill>
         <p:spPr>
           <a:xfrm>
-            <a:off x="5239512" y="2148840"/>
-            <a:ext cx="1810512" cy="1357884"/>
+            <a:off x="5340096" y="2139696"/>
+            <a:ext cx="1609344" cy="1207008"/>
           </a:xfrm>
           <a:prstGeom prst="rect">
             <a:avLst/>
@@ -13095,6 +13039,134 @@
           </a:p>
         </p:txBody>
       </p:sp>
+      <p:sp>
+        <p:nvSpPr>
+          <p:cNvPr id="22" name="Rounded Rectangle 21"/>
+          <p:cNvSpPr/>
+          <p:nvPr/>
+        </p:nvSpPr>
+        <p:spPr>
+          <a:gradFill rotWithShape="1">
+            <a:gsLst>
+              <a:gs pos="0">
+                <a:srgbClr val="16B9B0"/>
+              </a:gs>
+              <a:gs pos="42000">
+                <a:srgbClr val="F5C66A"/>
+              </a:gs>
+              <a:gs pos="72000">
+                <a:srgbClr val="6D7BF7"/>
+              </a:gs>
+              <a:gs pos="100000">
+                <a:srgbClr val="16B9B0"/>
+              </a:gs>
+            </a:gsLst>
+            <a:lin ang="2700000" scaled="1"/>
+          </a:gradFill>
+          <a:xfrm>
+            <a:off x="8266175" y="6245352"/>
+            <a:ext cx="768096" cy="576072"/>
+          </a:xfrm>
+          <a:prstGeom prst="roundRect">
+            <a:avLst/>
+          </a:prstGeom>
+          <a:ln w="13970">
+            <a:solidFill>
+              <a:srgbClr val="FFFFFF"/>
+            </a:solidFill>
+          </a:ln>
+        </p:spPr>
+        <p:style>
+          <a:lnRef idx="1">
+            <a:schemeClr val="accent1"/>
+          </a:lnRef>
+          <a:fillRef idx="3">
+            <a:schemeClr val="accent1"/>
+          </a:fillRef>
+          <a:effectRef idx="2">
+            <a:schemeClr val="accent1"/>
+          </a:effectRef>
+          <a:fontRef idx="minor">
+            <a:schemeClr val="lt1"/>
+          </a:fontRef>
+        </p:style>
+        <p:txBody>
+          <a:bodyPr rtlCol="0" anchor="ctr"/>
+          <a:lstStyle/>
+          <a:p>
+            <a:pPr algn="ctr"/>
+          </a:p>
+        </p:txBody>
+      </p:sp>
+      <p:sp>
+        <p:nvSpPr>
+          <p:cNvPr id="23" name="Rounded Rectangle 22"/>
+          <p:cNvSpPr/>
+          <p:nvPr/>
+        </p:nvSpPr>
+        <p:spPr>
+          <a:xfrm>
+            <a:off x="8289036" y="6268212"/>
+            <a:ext cx="722375" cy="530352"/>
+          </a:xfrm>
+          <a:prstGeom prst="roundRect">
+            <a:avLst/>
+          </a:prstGeom>
+          <a:solidFill>
+            <a:srgbClr val="F8FAFC"/>
+          </a:solidFill>
+          <a:ln w="10160">
+            <a:solidFill>
+              <a:srgbClr val="FFFFFF"/>
+            </a:solidFill>
+          </a:ln>
+        </p:spPr>
+        <p:style>
+          <a:lnRef idx="1">
+            <a:schemeClr val="accent1"/>
+          </a:lnRef>
+          <a:fillRef idx="3">
+            <a:schemeClr val="accent1"/>
+          </a:fillRef>
+          <a:effectRef idx="2">
+            <a:schemeClr val="accent1"/>
+          </a:effectRef>
+          <a:fontRef idx="minor">
+            <a:schemeClr val="lt1"/>
+          </a:fontRef>
+        </p:style>
+        <p:txBody>
+          <a:bodyPr rtlCol="0" anchor="ctr"/>
+          <a:lstStyle/>
+          <a:p>
+            <a:pPr algn="ctr"/>
+          </a:p>
+        </p:txBody>
+      </p:sp>
+      <p:pic>
+        <p:nvPicPr>
+          <p:cNvPr id="24" name="Picture 23" descr="image.jpg"/>
+          <p:cNvPicPr>
+            <a:picLocks noChangeAspect="1"/>
+          </p:cNvPicPr>
+          <p:nvPr/>
+        </p:nvPicPr>
+        <p:blipFill>
+          <a:blip r:embed="rId2"/>
+          <a:stretch>
+            <a:fillRect/>
+          </a:stretch>
+        </p:blipFill>
+        <p:spPr>
+          <a:xfrm>
+            <a:off x="8321040" y="6286500"/>
+            <a:ext cx="658368" cy="493776"/>
+          </a:xfrm>
+          <a:prstGeom prst="rect">
+            <a:avLst/>
+          </a:prstGeom>
+        </p:spPr>
+      </p:pic>
     </p:spTree>
   </p:cSld>
   <p:clrMapOvr>
@@ -13992,6 +14064,134 @@
           </a:p>
         </p:txBody>
       </p:sp>
+      <p:sp>
+        <p:nvSpPr>
+          <p:cNvPr id="22" name="Rounded Rectangle 21"/>
+          <p:cNvSpPr/>
+          <p:nvPr/>
+        </p:nvSpPr>
+        <p:spPr>
+          <a:gradFill rotWithShape="1">
+            <a:gsLst>
+              <a:gs pos="0">
+                <a:srgbClr val="16B9B0"/>
+              </a:gs>
+              <a:gs pos="42000">
+                <a:srgbClr val="F5C66A"/>
+              </a:gs>
+              <a:gs pos="72000">
+                <a:srgbClr val="6D7BF7"/>
+              </a:gs>
+              <a:gs pos="100000">
+                <a:srgbClr val="16B9B0"/>
+              </a:gs>
+            </a:gsLst>
+            <a:lin ang="2700000" scaled="1"/>
+          </a:gradFill>
+          <a:xfrm>
+            <a:off x="8266175" y="6245352"/>
+            <a:ext cx="768096" cy="576072"/>
+          </a:xfrm>
+          <a:prstGeom prst="roundRect">
+            <a:avLst/>
+          </a:prstGeom>
+          <a:ln w="13970">
+            <a:solidFill>
+              <a:srgbClr val="FFFFFF"/>
+            </a:solidFill>
+          </a:ln>
+        </p:spPr>
+        <p:style>
+          <a:lnRef idx="1">
+            <a:schemeClr val="accent1"/>
+          </a:lnRef>
+          <a:fillRef idx="3">
+            <a:schemeClr val="accent1"/>
+          </a:fillRef>
+          <a:effectRef idx="2">
+            <a:schemeClr val="accent1"/>
+          </a:effectRef>
+          <a:fontRef idx="minor">
+            <a:schemeClr val="lt1"/>
+          </a:fontRef>
+        </p:style>
+        <p:txBody>
+          <a:bodyPr rtlCol="0" anchor="ctr"/>
+          <a:lstStyle/>
+          <a:p>
+            <a:pPr algn="ctr"/>
+          </a:p>
+        </p:txBody>
+      </p:sp>
+      <p:sp>
+        <p:nvSpPr>
+          <p:cNvPr id="23" name="Rounded Rectangle 22"/>
+          <p:cNvSpPr/>
+          <p:nvPr/>
+        </p:nvSpPr>
+        <p:spPr>
+          <a:xfrm>
+            <a:off x="8289036" y="6268212"/>
+            <a:ext cx="722375" cy="530352"/>
+          </a:xfrm>
+          <a:prstGeom prst="roundRect">
+            <a:avLst/>
+          </a:prstGeom>
+          <a:solidFill>
+            <a:srgbClr val="F8FAFC"/>
+          </a:solidFill>
+          <a:ln w="10160">
+            <a:solidFill>
+              <a:srgbClr val="FFFFFF"/>
+            </a:solidFill>
+          </a:ln>
+        </p:spPr>
+        <p:style>
+          <a:lnRef idx="1">
+            <a:schemeClr val="accent1"/>
+          </a:lnRef>
+          <a:fillRef idx="3">
+            <a:schemeClr val="accent1"/>
+          </a:fillRef>
+          <a:effectRef idx="2">
+            <a:schemeClr val="accent1"/>
+          </a:effectRef>
+          <a:fontRef idx="minor">
+            <a:schemeClr val="lt1"/>
+          </a:fontRef>
+        </p:style>
+        <p:txBody>
+          <a:bodyPr rtlCol="0" anchor="ctr"/>
+          <a:lstStyle/>
+          <a:p>
+            <a:pPr algn="ctr"/>
+          </a:p>
+        </p:txBody>
+      </p:sp>
+      <p:pic>
+        <p:nvPicPr>
+          <p:cNvPr id="24" name="Picture 23" descr="image.jpg"/>
+          <p:cNvPicPr>
+            <a:picLocks noChangeAspect="1"/>
+          </p:cNvPicPr>
+          <p:nvPr/>
+        </p:nvPicPr>
+        <p:blipFill>
+          <a:blip r:embed="rId2"/>
+          <a:stretch>
+            <a:fillRect/>
+          </a:stretch>
+        </p:blipFill>
+        <p:spPr>
+          <a:xfrm>
+            <a:off x="8321040" y="6286500"/>
+            <a:ext cx="658368" cy="493776"/>
+          </a:xfrm>
+          <a:prstGeom prst="rect">
+            <a:avLst/>
+          </a:prstGeom>
+        </p:spPr>
+      </p:pic>
     </p:spTree>
   </p:cSld>
   <p:clrMapOvr>
@@ -14982,6 +15182,134 @@
           </a:p>
         </p:txBody>
       </p:sp>
+      <p:sp>
+        <p:nvSpPr>
+          <p:cNvPr id="25" name="Rounded Rectangle 24"/>
+          <p:cNvSpPr/>
+          <p:nvPr/>
+        </p:nvSpPr>
+        <p:spPr>
+          <a:gradFill rotWithShape="1">
+            <a:gsLst>
+              <a:gs pos="0">
+                <a:srgbClr val="16B9B0"/>
+              </a:gs>
+              <a:gs pos="42000">
+                <a:srgbClr val="F5C66A"/>
+              </a:gs>
+              <a:gs pos="72000">
+                <a:srgbClr val="6D7BF7"/>
+              </a:gs>
+              <a:gs pos="100000">
+                <a:srgbClr val="16B9B0"/>
+              </a:gs>
+            </a:gsLst>
+            <a:lin ang="2700000" scaled="1"/>
+          </a:gradFill>
+          <a:xfrm>
+            <a:off x="8266175" y="6245352"/>
+            <a:ext cx="768096" cy="576072"/>
+          </a:xfrm>
+          <a:prstGeom prst="roundRect">
+            <a:avLst/>
+          </a:prstGeom>
+          <a:ln w="13970">
+            <a:solidFill>
+              <a:srgbClr val="FFFFFF"/>
+            </a:solidFill>
+          </a:ln>
+        </p:spPr>
+        <p:style>
+          <a:lnRef idx="1">
+            <a:schemeClr val="accent1"/>
+          </a:lnRef>
+          <a:fillRef idx="3">
+            <a:schemeClr val="accent1"/>
+          </a:fillRef>
+          <a:effectRef idx="2">
+            <a:schemeClr val="accent1"/>
+          </a:effectRef>
+          <a:fontRef idx="minor">
+            <a:schemeClr val="lt1"/>
+          </a:fontRef>
+        </p:style>
+        <p:txBody>
+          <a:bodyPr rtlCol="0" anchor="ctr"/>
+          <a:lstStyle/>
+          <a:p>
+            <a:pPr algn="ctr"/>
+          </a:p>
+        </p:txBody>
+      </p:sp>
+      <p:sp>
+        <p:nvSpPr>
+          <p:cNvPr id="26" name="Rounded Rectangle 25"/>
+          <p:cNvSpPr/>
+          <p:nvPr/>
+        </p:nvSpPr>
+        <p:spPr>
+          <a:xfrm>
+            <a:off x="8289036" y="6268212"/>
+            <a:ext cx="722375" cy="530352"/>
+          </a:xfrm>
+          <a:prstGeom prst="roundRect">
+            <a:avLst/>
+          </a:prstGeom>
+          <a:solidFill>
+            <a:srgbClr val="F8FAFC"/>
+          </a:solidFill>
+          <a:ln w="10160">
+            <a:solidFill>
+              <a:srgbClr val="FFFFFF"/>
+            </a:solidFill>
+          </a:ln>
+        </p:spPr>
+        <p:style>
+          <a:lnRef idx="1">
+            <a:schemeClr val="accent1"/>
+          </a:lnRef>
+          <a:fillRef idx="3">
+            <a:schemeClr val="accent1"/>
+          </a:fillRef>
+          <a:effectRef idx="2">
+            <a:schemeClr val="accent1"/>
+          </a:effectRef>
+          <a:fontRef idx="minor">
+            <a:schemeClr val="lt1"/>
+          </a:fontRef>
+        </p:style>
+        <p:txBody>
+          <a:bodyPr rtlCol="0" anchor="ctr"/>
+          <a:lstStyle/>
+          <a:p>
+            <a:pPr algn="ctr"/>
+          </a:p>
+        </p:txBody>
+      </p:sp>
+      <p:pic>
+        <p:nvPicPr>
+          <p:cNvPr id="27" name="Picture 26" descr="image.jpg"/>
+          <p:cNvPicPr>
+            <a:picLocks noChangeAspect="1"/>
+          </p:cNvPicPr>
+          <p:nvPr/>
+        </p:nvPicPr>
+        <p:blipFill>
+          <a:blip r:embed="rId2"/>
+          <a:stretch>
+            <a:fillRect/>
+          </a:stretch>
+        </p:blipFill>
+        <p:spPr>
+          <a:xfrm>
+            <a:off x="8321040" y="6286500"/>
+            <a:ext cx="658368" cy="493776"/>
+          </a:xfrm>
+          <a:prstGeom prst="rect">
+            <a:avLst/>
+          </a:prstGeom>
+        </p:spPr>
+      </p:pic>
     </p:spTree>
   </p:cSld>
   <p:clrMapOvr>
@@ -16081,6 +16409,134 @@
           </a:p>
         </p:txBody>
       </p:sp>
+      <p:sp>
+        <p:nvSpPr>
+          <p:cNvPr id="27" name="Rounded Rectangle 26"/>
+          <p:cNvSpPr/>
+          <p:nvPr/>
+        </p:nvSpPr>
+        <p:spPr>
+          <a:gradFill rotWithShape="1">
+            <a:gsLst>
+              <a:gs pos="0">
+                <a:srgbClr val="16B9B0"/>
+              </a:gs>
+              <a:gs pos="42000">
+                <a:srgbClr val="F5C66A"/>
+              </a:gs>
+              <a:gs pos="72000">
+                <a:srgbClr val="6D7BF7"/>
+              </a:gs>
+              <a:gs pos="100000">
+                <a:srgbClr val="16B9B0"/>
+              </a:gs>
+            </a:gsLst>
+            <a:lin ang="2700000" scaled="1"/>
+          </a:gradFill>
+          <a:xfrm>
+            <a:off x="8266175" y="6245352"/>
+            <a:ext cx="768096" cy="576072"/>
+          </a:xfrm>
+          <a:prstGeom prst="roundRect">
+            <a:avLst/>
+          </a:prstGeom>
+          <a:ln w="13970">
+            <a:solidFill>
+              <a:srgbClr val="FFFFFF"/>
+            </a:solidFill>
+          </a:ln>
+        </p:spPr>
+        <p:style>
+          <a:lnRef idx="1">
+            <a:schemeClr val="accent1"/>
+          </a:lnRef>
+          <a:fillRef idx="3">
+            <a:schemeClr val="accent1"/>
+          </a:fillRef>
+          <a:effectRef idx="2">
+            <a:schemeClr val="accent1"/>
+          </a:effectRef>
+          <a:fontRef idx="minor">
+            <a:schemeClr val="lt1"/>
+          </a:fontRef>
+        </p:style>
+        <p:txBody>
+          <a:bodyPr rtlCol="0" anchor="ctr"/>
+          <a:lstStyle/>
+          <a:p>
+            <a:pPr algn="ctr"/>
+          </a:p>
+        </p:txBody>
+      </p:sp>
+      <p:sp>
+        <p:nvSpPr>
+          <p:cNvPr id="28" name="Rounded Rectangle 27"/>
+          <p:cNvSpPr/>
+          <p:nvPr/>
+        </p:nvSpPr>
+        <p:spPr>
+          <a:xfrm>
+            <a:off x="8289036" y="6268212"/>
+            <a:ext cx="722375" cy="530352"/>
+          </a:xfrm>
+          <a:prstGeom prst="roundRect">
+            <a:avLst/>
+          </a:prstGeom>
+          <a:solidFill>
+            <a:srgbClr val="F8FAFC"/>
+          </a:solidFill>
+          <a:ln w="10160">
+            <a:solidFill>
+              <a:srgbClr val="FFFFFF"/>
+            </a:solidFill>
+          </a:ln>
+        </p:spPr>
+        <p:style>
+          <a:lnRef idx="1">
+            <a:schemeClr val="accent1"/>
+          </a:lnRef>
+          <a:fillRef idx="3">
+            <a:schemeClr val="accent1"/>
+          </a:fillRef>
+          <a:effectRef idx="2">
+            <a:schemeClr val="accent1"/>
+          </a:effectRef>
+          <a:fontRef idx="minor">
+            <a:schemeClr val="lt1"/>
+          </a:fontRef>
+        </p:style>
+        <p:txBody>
+          <a:bodyPr rtlCol="0" anchor="ctr"/>
+          <a:lstStyle/>
+          <a:p>
+            <a:pPr algn="ctr"/>
+          </a:p>
+        </p:txBody>
+      </p:sp>
+      <p:pic>
+        <p:nvPicPr>
+          <p:cNvPr id="29" name="Picture 28" descr="image.jpg"/>
+          <p:cNvPicPr>
+            <a:picLocks noChangeAspect="1"/>
+          </p:cNvPicPr>
+          <p:nvPr/>
+        </p:nvPicPr>
+        <p:blipFill>
+          <a:blip r:embed="rId2"/>
+          <a:stretch>
+            <a:fillRect/>
+          </a:stretch>
+        </p:blipFill>
+        <p:spPr>
+          <a:xfrm>
+            <a:off x="8321040" y="6286500"/>
+            <a:ext cx="658368" cy="493776"/>
+          </a:xfrm>
+          <a:prstGeom prst="rect">
+            <a:avLst/>
+          </a:prstGeom>
+        </p:spPr>
+      </p:pic>
     </p:spTree>
   </p:cSld>
   <p:clrMapOvr>
@@ -17023,6 +17479,134 @@
           </a:p>
         </p:txBody>
       </p:sp>
+      <p:sp>
+        <p:nvSpPr>
+          <p:cNvPr id="24" name="Rounded Rectangle 23"/>
+          <p:cNvSpPr/>
+          <p:nvPr/>
+        </p:nvSpPr>
+        <p:spPr>
+          <a:gradFill rotWithShape="1">
+            <a:gsLst>
+              <a:gs pos="0">
+                <a:srgbClr val="16B9B0"/>
+              </a:gs>
+              <a:gs pos="42000">
+                <a:srgbClr val="F5C66A"/>
+              </a:gs>
+              <a:gs pos="72000">
+                <a:srgbClr val="6D7BF7"/>
+              </a:gs>
+              <a:gs pos="100000">
+                <a:srgbClr val="16B9B0"/>
+              </a:gs>
+            </a:gsLst>
+            <a:lin ang="2700000" scaled="1"/>
+          </a:gradFill>
+          <a:xfrm>
+            <a:off x="8266175" y="6245352"/>
+            <a:ext cx="768096" cy="576072"/>
+          </a:xfrm>
+          <a:prstGeom prst="roundRect">
+            <a:avLst/>
+          </a:prstGeom>
+          <a:ln w="13970">
+            <a:solidFill>
+              <a:srgbClr val="FFFFFF"/>
+            </a:solidFill>
+          </a:ln>
+        </p:spPr>
+        <p:style>
+          <a:lnRef idx="1">
+            <a:schemeClr val="accent1"/>
+          </a:lnRef>
+          <a:fillRef idx="3">
+            <a:schemeClr val="accent1"/>
+          </a:fillRef>
+          <a:effectRef idx="2">
+            <a:schemeClr val="accent1"/>
+          </a:effectRef>
+          <a:fontRef idx="minor">
+            <a:schemeClr val="lt1"/>
+          </a:fontRef>
+        </p:style>
+        <p:txBody>
+          <a:bodyPr rtlCol="0" anchor="ctr"/>
+          <a:lstStyle/>
+          <a:p>
+            <a:pPr algn="ctr"/>
+          </a:p>
+        </p:txBody>
+      </p:sp>
+      <p:sp>
+        <p:nvSpPr>
+          <p:cNvPr id="25" name="Rounded Rectangle 24"/>
+          <p:cNvSpPr/>
+          <p:nvPr/>
+        </p:nvSpPr>
+        <p:spPr>
+          <a:xfrm>
+            <a:off x="8289036" y="6268212"/>
+            <a:ext cx="722375" cy="530352"/>
+          </a:xfrm>
+          <a:prstGeom prst="roundRect">
+            <a:avLst/>
+          </a:prstGeom>
+          <a:solidFill>
+            <a:srgbClr val="F8FAFC"/>
+          </a:solidFill>
+          <a:ln w="10160">
+            <a:solidFill>
+              <a:srgbClr val="FFFFFF"/>
+            </a:solidFill>
+          </a:ln>
+        </p:spPr>
+        <p:style>
+          <a:lnRef idx="1">
+            <a:schemeClr val="accent1"/>
+          </a:lnRef>
+          <a:fillRef idx="3">
+            <a:schemeClr val="accent1"/>
+          </a:fillRef>
+          <a:effectRef idx="2">
+            <a:schemeClr val="accent1"/>
+          </a:effectRef>
+          <a:fontRef idx="minor">
+            <a:schemeClr val="lt1"/>
+          </a:fontRef>
+        </p:style>
+        <p:txBody>
+          <a:bodyPr rtlCol="0" anchor="ctr"/>
+          <a:lstStyle/>
+          <a:p>
+            <a:pPr algn="ctr"/>
+          </a:p>
+        </p:txBody>
+      </p:sp>
+      <p:pic>
+        <p:nvPicPr>
+          <p:cNvPr id="26" name="Picture 25" descr="image.jpg"/>
+          <p:cNvPicPr>
+            <a:picLocks noChangeAspect="1"/>
+          </p:cNvPicPr>
+          <p:nvPr/>
+        </p:nvPicPr>
+        <p:blipFill>
+          <a:blip r:embed="rId3"/>
+          <a:stretch>
+            <a:fillRect/>
+          </a:stretch>
+        </p:blipFill>
+        <p:spPr>
+          <a:xfrm>
+            <a:off x="8321040" y="6286500"/>
+            <a:ext cx="658368" cy="493776"/>
+          </a:xfrm>
+          <a:prstGeom prst="rect">
+            <a:avLst/>
+          </a:prstGeom>
+        </p:spPr>
+      </p:pic>
     </p:spTree>
   </p:cSld>
   <p:clrMapOvr>
@@ -17658,6 +18242,134 @@
           </a:p>
         </p:txBody>
       </p:sp>
+      <p:sp>
+        <p:nvSpPr>
+          <p:cNvPr id="15" name="Rounded Rectangle 14"/>
+          <p:cNvSpPr/>
+          <p:nvPr/>
+        </p:nvSpPr>
+        <p:spPr>
+          <a:gradFill rotWithShape="1">
+            <a:gsLst>
+              <a:gs pos="0">
+                <a:srgbClr val="16B9B0"/>
+              </a:gs>
+              <a:gs pos="42000">
+                <a:srgbClr val="F5C66A"/>
+              </a:gs>
+              <a:gs pos="72000">
+                <a:srgbClr val="6D7BF7"/>
+              </a:gs>
+              <a:gs pos="100000">
+                <a:srgbClr val="16B9B0"/>
+              </a:gs>
+            </a:gsLst>
+            <a:lin ang="2700000" scaled="1"/>
+          </a:gradFill>
+          <a:xfrm>
+            <a:off x="8266175" y="6245352"/>
+            <a:ext cx="768096" cy="576072"/>
+          </a:xfrm>
+          <a:prstGeom prst="roundRect">
+            <a:avLst/>
+          </a:prstGeom>
+          <a:ln w="13970">
+            <a:solidFill>
+              <a:srgbClr val="FFFFFF"/>
+            </a:solidFill>
+          </a:ln>
+        </p:spPr>
+        <p:style>
+          <a:lnRef idx="1">
+            <a:schemeClr val="accent1"/>
+          </a:lnRef>
+          <a:fillRef idx="3">
+            <a:schemeClr val="accent1"/>
+          </a:fillRef>
+          <a:effectRef idx="2">
+            <a:schemeClr val="accent1"/>
+          </a:effectRef>
+          <a:fontRef idx="minor">
+            <a:schemeClr val="lt1"/>
+          </a:fontRef>
+        </p:style>
+        <p:txBody>
+          <a:bodyPr rtlCol="0" anchor="ctr"/>
+          <a:lstStyle/>
+          <a:p>
+            <a:pPr algn="ctr"/>
+          </a:p>
+        </p:txBody>
+      </p:sp>
+      <p:sp>
+        <p:nvSpPr>
+          <p:cNvPr id="16" name="Rounded Rectangle 15"/>
+          <p:cNvSpPr/>
+          <p:nvPr/>
+        </p:nvSpPr>
+        <p:spPr>
+          <a:xfrm>
+            <a:off x="8289036" y="6268212"/>
+            <a:ext cx="722375" cy="530352"/>
+          </a:xfrm>
+          <a:prstGeom prst="roundRect">
+            <a:avLst/>
+          </a:prstGeom>
+          <a:solidFill>
+            <a:srgbClr val="F8FAFC"/>
+          </a:solidFill>
+          <a:ln w="10160">
+            <a:solidFill>
+              <a:srgbClr val="FFFFFF"/>
+            </a:solidFill>
+          </a:ln>
+        </p:spPr>
+        <p:style>
+          <a:lnRef idx="1">
+            <a:schemeClr val="accent1"/>
+          </a:lnRef>
+          <a:fillRef idx="3">
+            <a:schemeClr val="accent1"/>
+          </a:fillRef>
+          <a:effectRef idx="2">
+            <a:schemeClr val="accent1"/>
+          </a:effectRef>
+          <a:fontRef idx="minor">
+            <a:schemeClr val="lt1"/>
+          </a:fontRef>
+        </p:style>
+        <p:txBody>
+          <a:bodyPr rtlCol="0" anchor="ctr"/>
+          <a:lstStyle/>
+          <a:p>
+            <a:pPr algn="ctr"/>
+          </a:p>
+        </p:txBody>
+      </p:sp>
+      <p:pic>
+        <p:nvPicPr>
+          <p:cNvPr id="17" name="Picture 16" descr="image.jpg"/>
+          <p:cNvPicPr>
+            <a:picLocks noChangeAspect="1"/>
+          </p:cNvPicPr>
+          <p:nvPr/>
+        </p:nvPicPr>
+        <p:blipFill>
+          <a:blip r:embed="rId2"/>
+          <a:stretch>
+            <a:fillRect/>
+          </a:stretch>
+        </p:blipFill>
+        <p:spPr>
+          <a:xfrm>
+            <a:off x="8321040" y="6286500"/>
+            <a:ext cx="658368" cy="493776"/>
+          </a:xfrm>
+          <a:prstGeom prst="rect">
+            <a:avLst/>
+          </a:prstGeom>
+        </p:spPr>
+      </p:pic>
     </p:spTree>
   </p:cSld>
   <p:clrMapOvr>
@@ -17751,7 +18463,7 @@
                 </a:solidFill>
                 <a:latin typeface="Calibri Light"/>
               </a:rPr>
-              <a:t>Tres libros en español disponibles en catálogos bolivianos</a:t>
+              <a:t>Referencias bibliográficas</a:t>
             </a:r>
           </a:p>
         </p:txBody>
@@ -17923,7 +18635,7 @@
                 </a:solidFill>
                 <a:latin typeface="Calibri"/>
               </a:rPr>
-              <a:t>DIGITAL · BIBLIOTECA UCB · LIBRO 1</a:t>
+              <a:t>DIGITAL · LIBRO 1</a:t>
             </a:r>
           </a:p>
         </p:txBody>
@@ -18143,7 +18855,7 @@
                 </a:solidFill>
                 <a:latin typeface="Calibri"/>
               </a:rPr>
-              <a:t>DIGITAL · BIBLIOTECA UCB · LIBRO 2</a:t>
+              <a:t>DIGITAL · LIBRO 2</a:t>
             </a:r>
           </a:p>
         </p:txBody>
@@ -18363,7 +19075,7 @@
                 </a:solidFill>
                 <a:latin typeface="Calibri"/>
               </a:rPr>
-              <a:t>IMPRESO · CATÁLOGO UPDS</a:t>
+              <a:t>IMPRESO · LIBRO 3</a:t>
             </a:r>
           </a:p>
         </p:txBody>
@@ -18503,66 +19215,139 @@
                 </a:solidFill>
                 <a:latin typeface="Calibri"/>
               </a:rPr>
-              <a:t>Consultar ficha UPDS ↗</a:t>
+              <a:t>Consultar ficha bibliográfica ↗</a:t>
             </a:r>
           </a:p>
         </p:txBody>
       </p:sp>
       <p:sp>
         <p:nvSpPr>
-          <p:cNvPr id="22" name="TextBox 21"/>
-          <p:cNvSpPr txBox="1"/>
+          <p:cNvPr id="23" name="Rounded Rectangle 22"/>
+          <p:cNvSpPr/>
           <p:nvPr/>
         </p:nvSpPr>
         <p:spPr>
+          <a:gradFill rotWithShape="1">
+            <a:gsLst>
+              <a:gs pos="0">
+                <a:srgbClr val="16B9B0"/>
+              </a:gs>
+              <a:gs pos="42000">
+                <a:srgbClr val="F5C66A"/>
+              </a:gs>
+              <a:gs pos="72000">
+                <a:srgbClr val="6D7BF7"/>
+              </a:gs>
+              <a:gs pos="100000">
+                <a:srgbClr val="16B9B0"/>
+              </a:gs>
+            </a:gsLst>
+            <a:lin ang="2700000" scaled="1"/>
+          </a:gradFill>
           <a:xfrm>
-            <a:off x="384048" y="6053328"/>
-            <a:ext cx="7818120" cy="220133"/>
+            <a:off x="8266175" y="6245352"/>
+            <a:ext cx="768096" cy="576072"/>
+          </a:xfrm>
+          <a:prstGeom prst="roundRect">
+            <a:avLst/>
+          </a:prstGeom>
+          <a:ln w="13970">
+            <a:solidFill>
+              <a:srgbClr val="FFFFFF"/>
+            </a:solidFill>
+          </a:ln>
+        </p:spPr>
+        <p:style>
+          <a:lnRef idx="1">
+            <a:schemeClr val="accent1"/>
+          </a:lnRef>
+          <a:fillRef idx="3">
+            <a:schemeClr val="accent1"/>
+          </a:fillRef>
+          <a:effectRef idx="2">
+            <a:schemeClr val="accent1"/>
+          </a:effectRef>
+          <a:fontRef idx="minor">
+            <a:schemeClr val="lt1"/>
+          </a:fontRef>
+        </p:style>
+        <p:txBody>
+          <a:bodyPr rtlCol="0" anchor="ctr"/>
+          <a:lstStyle/>
+          <a:p>
+            <a:pPr algn="ctr"/>
+          </a:p>
+        </p:txBody>
+      </p:sp>
+      <p:sp>
+        <p:nvSpPr>
+          <p:cNvPr id="24" name="Rounded Rectangle 23"/>
+          <p:cNvSpPr/>
+          <p:nvPr/>
+        </p:nvSpPr>
+        <p:spPr>
+          <a:xfrm>
+            <a:off x="8289036" y="6268212"/>
+            <a:ext cx="722375" cy="530352"/>
+          </a:xfrm>
+          <a:prstGeom prst="roundRect">
+            <a:avLst/>
+          </a:prstGeom>
+          <a:solidFill>
+            <a:srgbClr val="F8FAFC"/>
+          </a:solidFill>
+          <a:ln w="10160">
+            <a:solidFill>
+              <a:srgbClr val="FFFFFF"/>
+            </a:solidFill>
+          </a:ln>
+        </p:spPr>
+        <p:style>
+          <a:lnRef idx="1">
+            <a:schemeClr val="accent1"/>
+          </a:lnRef>
+          <a:fillRef idx="3">
+            <a:schemeClr val="accent1"/>
+          </a:fillRef>
+          <a:effectRef idx="2">
+            <a:schemeClr val="accent1"/>
+          </a:effectRef>
+          <a:fontRef idx="minor">
+            <a:schemeClr val="lt1"/>
+          </a:fontRef>
+        </p:style>
+        <p:txBody>
+          <a:bodyPr rtlCol="0" anchor="ctr"/>
+          <a:lstStyle/>
+          <a:p>
+            <a:pPr algn="ctr"/>
+          </a:p>
+        </p:txBody>
+      </p:sp>
+      <p:pic>
+        <p:nvPicPr>
+          <p:cNvPr id="25" name="Picture 24" descr="image.jpg"/>
+          <p:cNvPicPr>
+            <a:picLocks noChangeAspect="1"/>
+          </p:cNvPicPr>
+          <p:nvPr/>
+        </p:nvPicPr>
+        <p:blipFill>
+          <a:blip r:embed="rId5"/>
+          <a:stretch>
+            <a:fillRect/>
+          </a:stretch>
+        </p:blipFill>
+        <p:spPr>
+          <a:xfrm>
+            <a:off x="8321040" y="6286500"/>
+            <a:ext cx="658368" cy="493776"/>
           </a:xfrm>
           <a:prstGeom prst="rect">
             <a:avLst/>
           </a:prstGeom>
-          <a:noFill/>
-          <a:ln/>
-        </p:spPr>
-        <p:txBody>
-          <a:bodyPr wrap="square" anchor="t" lIns="25400" rIns="25400" tIns="25400" bIns="25400">
-            <a:spAutoFit/>
-          </a:bodyPr>
-          <a:lstStyle/>
-          <a:p>
-            <a:pPr algn="l">
-              <a:lnSpc>
-                <a:spcPct val="100000"/>
-              </a:lnSpc>
-              <a:spcBef>
-                <a:spcPts val="0"/>
-              </a:spcBef>
-              <a:spcAft>
-                <a:spcPts val="0"/>
-              </a:spcAft>
-            </a:pPr>
-            <a:r>
-              <a:rPr sz="760" b="1" i="0">
-                <a:solidFill>
-                  <a:srgbClr val="64748B"/>
-                </a:solidFill>
-                <a:latin typeface="Calibri"/>
-              </a:rPr>
-              <a:t>Fuente: </a:t>
-            </a:r>
-            <a:r>
-              <a:rPr sz="760" b="0" i="0">
-                <a:solidFill>
-                  <a:srgbClr val="64748B"/>
-                </a:solidFill>
-                <a:latin typeface="Calibri"/>
-              </a:rPr>
-              <a:t>Catálogo digital UCB Santa Cruz · Catálogo UPDS · referencias registradas por tema  ·  as of 6 de octubre de 2026</a:t>
-            </a:r>
-          </a:p>
-        </p:txBody>
-      </p:sp>
+        </p:spPr>
+      </p:pic>
     </p:spTree>
   </p:cSld>
   <p:clrMapOvr>

--- a/materiales/actividad-1/tema-03-objetos-estados-v4.pptx
+++ b/materiales/actividad-1/tema-03-objetos-estados-v4.pptx
@@ -13039,134 +13039,6 @@
           </a:p>
         </p:txBody>
       </p:sp>
-      <p:sp>
-        <p:nvSpPr>
-          <p:cNvPr id="22" name="Rounded Rectangle 21"/>
-          <p:cNvSpPr/>
-          <p:nvPr/>
-        </p:nvSpPr>
-        <p:spPr>
-          <a:gradFill rotWithShape="1">
-            <a:gsLst>
-              <a:gs pos="0">
-                <a:srgbClr val="16B9B0"/>
-              </a:gs>
-              <a:gs pos="42000">
-                <a:srgbClr val="F5C66A"/>
-              </a:gs>
-              <a:gs pos="72000">
-                <a:srgbClr val="6D7BF7"/>
-              </a:gs>
-              <a:gs pos="100000">
-                <a:srgbClr val="16B9B0"/>
-              </a:gs>
-            </a:gsLst>
-            <a:lin ang="2700000" scaled="1"/>
-          </a:gradFill>
-          <a:xfrm>
-            <a:off x="8266175" y="6245352"/>
-            <a:ext cx="768096" cy="576072"/>
-          </a:xfrm>
-          <a:prstGeom prst="roundRect">
-            <a:avLst/>
-          </a:prstGeom>
-          <a:ln w="13970">
-            <a:solidFill>
-              <a:srgbClr val="FFFFFF"/>
-            </a:solidFill>
-          </a:ln>
-        </p:spPr>
-        <p:style>
-          <a:lnRef idx="1">
-            <a:schemeClr val="accent1"/>
-          </a:lnRef>
-          <a:fillRef idx="3">
-            <a:schemeClr val="accent1"/>
-          </a:fillRef>
-          <a:effectRef idx="2">
-            <a:schemeClr val="accent1"/>
-          </a:effectRef>
-          <a:fontRef idx="minor">
-            <a:schemeClr val="lt1"/>
-          </a:fontRef>
-        </p:style>
-        <p:txBody>
-          <a:bodyPr rtlCol="0" anchor="ctr"/>
-          <a:lstStyle/>
-          <a:p>
-            <a:pPr algn="ctr"/>
-          </a:p>
-        </p:txBody>
-      </p:sp>
-      <p:sp>
-        <p:nvSpPr>
-          <p:cNvPr id="23" name="Rounded Rectangle 22"/>
-          <p:cNvSpPr/>
-          <p:nvPr/>
-        </p:nvSpPr>
-        <p:spPr>
-          <a:xfrm>
-            <a:off x="8289036" y="6268212"/>
-            <a:ext cx="722375" cy="530352"/>
-          </a:xfrm>
-          <a:prstGeom prst="roundRect">
-            <a:avLst/>
-          </a:prstGeom>
-          <a:solidFill>
-            <a:srgbClr val="F8FAFC"/>
-          </a:solidFill>
-          <a:ln w="10160">
-            <a:solidFill>
-              <a:srgbClr val="FFFFFF"/>
-            </a:solidFill>
-          </a:ln>
-        </p:spPr>
-        <p:style>
-          <a:lnRef idx="1">
-            <a:schemeClr val="accent1"/>
-          </a:lnRef>
-          <a:fillRef idx="3">
-            <a:schemeClr val="accent1"/>
-          </a:fillRef>
-          <a:effectRef idx="2">
-            <a:schemeClr val="accent1"/>
-          </a:effectRef>
-          <a:fontRef idx="minor">
-            <a:schemeClr val="lt1"/>
-          </a:fontRef>
-        </p:style>
-        <p:txBody>
-          <a:bodyPr rtlCol="0" anchor="ctr"/>
-          <a:lstStyle/>
-          <a:p>
-            <a:pPr algn="ctr"/>
-          </a:p>
-        </p:txBody>
-      </p:sp>
-      <p:pic>
-        <p:nvPicPr>
-          <p:cNvPr id="24" name="Picture 23" descr="image.jpg"/>
-          <p:cNvPicPr>
-            <a:picLocks noChangeAspect="1"/>
-          </p:cNvPicPr>
-          <p:nvPr/>
-        </p:nvPicPr>
-        <p:blipFill>
-          <a:blip r:embed="rId2"/>
-          <a:stretch>
-            <a:fillRect/>
-          </a:stretch>
-        </p:blipFill>
-        <p:spPr>
-          <a:xfrm>
-            <a:off x="8321040" y="6286500"/>
-            <a:ext cx="658368" cy="493776"/>
-          </a:xfrm>
-          <a:prstGeom prst="rect">
-            <a:avLst/>
-          </a:prstGeom>
-        </p:spPr>
-      </p:pic>
     </p:spTree>
   </p:cSld>
   <p:clrMapOvr>
@@ -14064,134 +13936,6 @@
           </a:p>
         </p:txBody>
       </p:sp>
-      <p:sp>
-        <p:nvSpPr>
-          <p:cNvPr id="22" name="Rounded Rectangle 21"/>
-          <p:cNvSpPr/>
-          <p:nvPr/>
-        </p:nvSpPr>
-        <p:spPr>
-          <a:gradFill rotWithShape="1">
-            <a:gsLst>
-              <a:gs pos="0">
-                <a:srgbClr val="16B9B0"/>
-              </a:gs>
-              <a:gs pos="42000">
-                <a:srgbClr val="F5C66A"/>
-              </a:gs>
-              <a:gs pos="72000">
-                <a:srgbClr val="6D7BF7"/>
-              </a:gs>
-              <a:gs pos="100000">
-                <a:srgbClr val="16B9B0"/>
-              </a:gs>
-            </a:gsLst>
-            <a:lin ang="2700000" scaled="1"/>
-          </a:gradFill>
-          <a:xfrm>
-            <a:off x="8266175" y="6245352"/>
-            <a:ext cx="768096" cy="576072"/>
-          </a:xfrm>
-          <a:prstGeom prst="roundRect">
-            <a:avLst/>
-          </a:prstGeom>
-          <a:ln w="13970">
-            <a:solidFill>
-              <a:srgbClr val="FFFFFF"/>
-            </a:solidFill>
-          </a:ln>
-        </p:spPr>
-        <p:style>
-          <a:lnRef idx="1">
-            <a:schemeClr val="accent1"/>
-          </a:lnRef>
-          <a:fillRef idx="3">
-            <a:schemeClr val="accent1"/>
-          </a:fillRef>
-          <a:effectRef idx="2">
-            <a:schemeClr val="accent1"/>
-          </a:effectRef>
-          <a:fontRef idx="minor">
-            <a:schemeClr val="lt1"/>
-          </a:fontRef>
-        </p:style>
-        <p:txBody>
-          <a:bodyPr rtlCol="0" anchor="ctr"/>
-          <a:lstStyle/>
-          <a:p>
-            <a:pPr algn="ctr"/>
-          </a:p>
-        </p:txBody>
-      </p:sp>
-      <p:sp>
-        <p:nvSpPr>
-          <p:cNvPr id="23" name="Rounded Rectangle 22"/>
-          <p:cNvSpPr/>
-          <p:nvPr/>
-        </p:nvSpPr>
-        <p:spPr>
-          <a:xfrm>
-            <a:off x="8289036" y="6268212"/>
-            <a:ext cx="722375" cy="530352"/>
-          </a:xfrm>
-          <a:prstGeom prst="roundRect">
-            <a:avLst/>
-          </a:prstGeom>
-          <a:solidFill>
-            <a:srgbClr val="F8FAFC"/>
-          </a:solidFill>
-          <a:ln w="10160">
-            <a:solidFill>
-              <a:srgbClr val="FFFFFF"/>
-            </a:solidFill>
-          </a:ln>
-        </p:spPr>
-        <p:style>
-          <a:lnRef idx="1">
-            <a:schemeClr val="accent1"/>
-          </a:lnRef>
-          <a:fillRef idx="3">
-            <a:schemeClr val="accent1"/>
-          </a:fillRef>
-          <a:effectRef idx="2">
-            <a:schemeClr val="accent1"/>
-          </a:effectRef>
-          <a:fontRef idx="minor">
-            <a:schemeClr val="lt1"/>
-          </a:fontRef>
-        </p:style>
-        <p:txBody>
-          <a:bodyPr rtlCol="0" anchor="ctr"/>
-          <a:lstStyle/>
-          <a:p>
-            <a:pPr algn="ctr"/>
-          </a:p>
-        </p:txBody>
-      </p:sp>
-      <p:pic>
-        <p:nvPicPr>
-          <p:cNvPr id="24" name="Picture 23" descr="image.jpg"/>
-          <p:cNvPicPr>
-            <a:picLocks noChangeAspect="1"/>
-          </p:cNvPicPr>
-          <p:nvPr/>
-        </p:nvPicPr>
-        <p:blipFill>
-          <a:blip r:embed="rId2"/>
-          <a:stretch>
-            <a:fillRect/>
-          </a:stretch>
-        </p:blipFill>
-        <p:spPr>
-          <a:xfrm>
-            <a:off x="8321040" y="6286500"/>
-            <a:ext cx="658368" cy="493776"/>
-          </a:xfrm>
-          <a:prstGeom prst="rect">
-            <a:avLst/>
-          </a:prstGeom>
-        </p:spPr>
-      </p:pic>
     </p:spTree>
   </p:cSld>
   <p:clrMapOvr>
@@ -15182,134 +14926,6 @@
           </a:p>
         </p:txBody>
       </p:sp>
-      <p:sp>
-        <p:nvSpPr>
-          <p:cNvPr id="25" name="Rounded Rectangle 24"/>
-          <p:cNvSpPr/>
-          <p:nvPr/>
-        </p:nvSpPr>
-        <p:spPr>
-          <a:gradFill rotWithShape="1">
-            <a:gsLst>
-              <a:gs pos="0">
-                <a:srgbClr val="16B9B0"/>
-              </a:gs>
-              <a:gs pos="42000">
-                <a:srgbClr val="F5C66A"/>
-              </a:gs>
-              <a:gs pos="72000">
-                <a:srgbClr val="6D7BF7"/>
-              </a:gs>
-              <a:gs pos="100000">
-                <a:srgbClr val="16B9B0"/>
-              </a:gs>
-            </a:gsLst>
-            <a:lin ang="2700000" scaled="1"/>
-          </a:gradFill>
-          <a:xfrm>
-            <a:off x="8266175" y="6245352"/>
-            <a:ext cx="768096" cy="576072"/>
-          </a:xfrm>
-          <a:prstGeom prst="roundRect">
-            <a:avLst/>
-          </a:prstGeom>
-          <a:ln w="13970">
-            <a:solidFill>
-              <a:srgbClr val="FFFFFF"/>
-            </a:solidFill>
-          </a:ln>
-        </p:spPr>
-        <p:style>
-          <a:lnRef idx="1">
-            <a:schemeClr val="accent1"/>
-          </a:lnRef>
-          <a:fillRef idx="3">
-            <a:schemeClr val="accent1"/>
-          </a:fillRef>
-          <a:effectRef idx="2">
-            <a:schemeClr val="accent1"/>
-          </a:effectRef>
-          <a:fontRef idx="minor">
-            <a:schemeClr val="lt1"/>
-          </a:fontRef>
-        </p:style>
-        <p:txBody>
-          <a:bodyPr rtlCol="0" anchor="ctr"/>
-          <a:lstStyle/>
-          <a:p>
-            <a:pPr algn="ctr"/>
-          </a:p>
-        </p:txBody>
-      </p:sp>
-      <p:sp>
-        <p:nvSpPr>
-          <p:cNvPr id="26" name="Rounded Rectangle 25"/>
-          <p:cNvSpPr/>
-          <p:nvPr/>
-        </p:nvSpPr>
-        <p:spPr>
-          <a:xfrm>
-            <a:off x="8289036" y="6268212"/>
-            <a:ext cx="722375" cy="530352"/>
-          </a:xfrm>
-          <a:prstGeom prst="roundRect">
-            <a:avLst/>
-          </a:prstGeom>
-          <a:solidFill>
-            <a:srgbClr val="F8FAFC"/>
-          </a:solidFill>
-          <a:ln w="10160">
-            <a:solidFill>
-              <a:srgbClr val="FFFFFF"/>
-            </a:solidFill>
-          </a:ln>
-        </p:spPr>
-        <p:style>
-          <a:lnRef idx="1">
-            <a:schemeClr val="accent1"/>
-          </a:lnRef>
-          <a:fillRef idx="3">
-            <a:schemeClr val="accent1"/>
-          </a:fillRef>
-          <a:effectRef idx="2">
-            <a:schemeClr val="accent1"/>
-          </a:effectRef>
-          <a:fontRef idx="minor">
-            <a:schemeClr val="lt1"/>
-          </a:fontRef>
-        </p:style>
-        <p:txBody>
-          <a:bodyPr rtlCol="0" anchor="ctr"/>
-          <a:lstStyle/>
-          <a:p>
-            <a:pPr algn="ctr"/>
-          </a:p>
-        </p:txBody>
-      </p:sp>
-      <p:pic>
-        <p:nvPicPr>
-          <p:cNvPr id="27" name="Picture 26" descr="image.jpg"/>
-          <p:cNvPicPr>
-            <a:picLocks noChangeAspect="1"/>
-          </p:cNvPicPr>
-          <p:nvPr/>
-        </p:nvPicPr>
-        <p:blipFill>
-          <a:blip r:embed="rId2"/>
-          <a:stretch>
-            <a:fillRect/>
-          </a:stretch>
-        </p:blipFill>
-        <p:spPr>
-          <a:xfrm>
-            <a:off x="8321040" y="6286500"/>
-            <a:ext cx="658368" cy="493776"/>
-          </a:xfrm>
-          <a:prstGeom prst="rect">
-            <a:avLst/>
-          </a:prstGeom>
-        </p:spPr>
-      </p:pic>
     </p:spTree>
   </p:cSld>
   <p:clrMapOvr>
@@ -16409,134 +16025,6 @@
           </a:p>
         </p:txBody>
       </p:sp>
-      <p:sp>
-        <p:nvSpPr>
-          <p:cNvPr id="27" name="Rounded Rectangle 26"/>
-          <p:cNvSpPr/>
-          <p:nvPr/>
-        </p:nvSpPr>
-        <p:spPr>
-          <a:gradFill rotWithShape="1">
-            <a:gsLst>
-              <a:gs pos="0">
-                <a:srgbClr val="16B9B0"/>
-              </a:gs>
-              <a:gs pos="42000">
-                <a:srgbClr val="F5C66A"/>
-              </a:gs>
-              <a:gs pos="72000">
-                <a:srgbClr val="6D7BF7"/>
-              </a:gs>
-              <a:gs pos="100000">
-                <a:srgbClr val="16B9B0"/>
-              </a:gs>
-            </a:gsLst>
-            <a:lin ang="2700000" scaled="1"/>
-          </a:gradFill>
-          <a:xfrm>
-            <a:off x="8266175" y="6245352"/>
-            <a:ext cx="768096" cy="576072"/>
-          </a:xfrm>
-          <a:prstGeom prst="roundRect">
-            <a:avLst/>
-          </a:prstGeom>
-          <a:ln w="13970">
-            <a:solidFill>
-              <a:srgbClr val="FFFFFF"/>
-            </a:solidFill>
-          </a:ln>
-        </p:spPr>
-        <p:style>
-          <a:lnRef idx="1">
-            <a:schemeClr val="accent1"/>
-          </a:lnRef>
-          <a:fillRef idx="3">
-            <a:schemeClr val="accent1"/>
-          </a:fillRef>
-          <a:effectRef idx="2">
-            <a:schemeClr val="accent1"/>
-          </a:effectRef>
-          <a:fontRef idx="minor">
-            <a:schemeClr val="lt1"/>
-          </a:fontRef>
-        </p:style>
-        <p:txBody>
-          <a:bodyPr rtlCol="0" anchor="ctr"/>
-          <a:lstStyle/>
-          <a:p>
-            <a:pPr algn="ctr"/>
-          </a:p>
-        </p:txBody>
-      </p:sp>
-      <p:sp>
-        <p:nvSpPr>
-          <p:cNvPr id="28" name="Rounded Rectangle 27"/>
-          <p:cNvSpPr/>
-          <p:nvPr/>
-        </p:nvSpPr>
-        <p:spPr>
-          <a:xfrm>
-            <a:off x="8289036" y="6268212"/>
-            <a:ext cx="722375" cy="530352"/>
-          </a:xfrm>
-          <a:prstGeom prst="roundRect">
-            <a:avLst/>
-          </a:prstGeom>
-          <a:solidFill>
-            <a:srgbClr val="F8FAFC"/>
-          </a:solidFill>
-          <a:ln w="10160">
-            <a:solidFill>
-              <a:srgbClr val="FFFFFF"/>
-            </a:solidFill>
-          </a:ln>
-        </p:spPr>
-        <p:style>
-          <a:lnRef idx="1">
-            <a:schemeClr val="accent1"/>
-          </a:lnRef>
-          <a:fillRef idx="3">
-            <a:schemeClr val="accent1"/>
-          </a:fillRef>
-          <a:effectRef idx="2">
-            <a:schemeClr val="accent1"/>
-          </a:effectRef>
-          <a:fontRef idx="minor">
-            <a:schemeClr val="lt1"/>
-          </a:fontRef>
-        </p:style>
-        <p:txBody>
-          <a:bodyPr rtlCol="0" anchor="ctr"/>
-          <a:lstStyle/>
-          <a:p>
-            <a:pPr algn="ctr"/>
-          </a:p>
-        </p:txBody>
-      </p:sp>
-      <p:pic>
-        <p:nvPicPr>
-          <p:cNvPr id="29" name="Picture 28" descr="image.jpg"/>
-          <p:cNvPicPr>
-            <a:picLocks noChangeAspect="1"/>
-          </p:cNvPicPr>
-          <p:nvPr/>
-        </p:nvPicPr>
-        <p:blipFill>
-          <a:blip r:embed="rId2"/>
-          <a:stretch>
-            <a:fillRect/>
-          </a:stretch>
-        </p:blipFill>
-        <p:spPr>
-          <a:xfrm>
-            <a:off x="8321040" y="6286500"/>
-            <a:ext cx="658368" cy="493776"/>
-          </a:xfrm>
-          <a:prstGeom prst="rect">
-            <a:avLst/>
-          </a:prstGeom>
-        </p:spPr>
-      </p:pic>
     </p:spTree>
   </p:cSld>
   <p:clrMapOvr>
@@ -17479,134 +16967,6 @@
           </a:p>
         </p:txBody>
       </p:sp>
-      <p:sp>
-        <p:nvSpPr>
-          <p:cNvPr id="24" name="Rounded Rectangle 23"/>
-          <p:cNvSpPr/>
-          <p:nvPr/>
-        </p:nvSpPr>
-        <p:spPr>
-          <a:gradFill rotWithShape="1">
-            <a:gsLst>
-              <a:gs pos="0">
-                <a:srgbClr val="16B9B0"/>
-              </a:gs>
-              <a:gs pos="42000">
-                <a:srgbClr val="F5C66A"/>
-              </a:gs>
-              <a:gs pos="72000">
-                <a:srgbClr val="6D7BF7"/>
-              </a:gs>
-              <a:gs pos="100000">
-                <a:srgbClr val="16B9B0"/>
-              </a:gs>
-            </a:gsLst>
-            <a:lin ang="2700000" scaled="1"/>
-          </a:gradFill>
-          <a:xfrm>
-            <a:off x="8266175" y="6245352"/>
-            <a:ext cx="768096" cy="576072"/>
-          </a:xfrm>
-          <a:prstGeom prst="roundRect">
-            <a:avLst/>
-          </a:prstGeom>
-          <a:ln w="13970">
-            <a:solidFill>
-              <a:srgbClr val="FFFFFF"/>
-            </a:solidFill>
-          </a:ln>
-        </p:spPr>
-        <p:style>
-          <a:lnRef idx="1">
-            <a:schemeClr val="accent1"/>
-          </a:lnRef>
-          <a:fillRef idx="3">
-            <a:schemeClr val="accent1"/>
-          </a:fillRef>
-          <a:effectRef idx="2">
-            <a:schemeClr val="accent1"/>
-          </a:effectRef>
-          <a:fontRef idx="minor">
-            <a:schemeClr val="lt1"/>
-          </a:fontRef>
-        </p:style>
-        <p:txBody>
-          <a:bodyPr rtlCol="0" anchor="ctr"/>
-          <a:lstStyle/>
-          <a:p>
-            <a:pPr algn="ctr"/>
-          </a:p>
-        </p:txBody>
-      </p:sp>
-      <p:sp>
-        <p:nvSpPr>
-          <p:cNvPr id="25" name="Rounded Rectangle 24"/>
-          <p:cNvSpPr/>
-          <p:nvPr/>
-        </p:nvSpPr>
-        <p:spPr>
-          <a:xfrm>
-            <a:off x="8289036" y="6268212"/>
-            <a:ext cx="722375" cy="530352"/>
-          </a:xfrm>
-          <a:prstGeom prst="roundRect">
-            <a:avLst/>
-          </a:prstGeom>
-          <a:solidFill>
-            <a:srgbClr val="F8FAFC"/>
-          </a:solidFill>
-          <a:ln w="10160">
-            <a:solidFill>
-              <a:srgbClr val="FFFFFF"/>
-            </a:solidFill>
-          </a:ln>
-        </p:spPr>
-        <p:style>
-          <a:lnRef idx="1">
-            <a:schemeClr val="accent1"/>
-          </a:lnRef>
-          <a:fillRef idx="3">
-            <a:schemeClr val="accent1"/>
-          </a:fillRef>
-          <a:effectRef idx="2">
-            <a:schemeClr val="accent1"/>
-          </a:effectRef>
-          <a:fontRef idx="minor">
-            <a:schemeClr val="lt1"/>
-          </a:fontRef>
-        </p:style>
-        <p:txBody>
-          <a:bodyPr rtlCol="0" anchor="ctr"/>
-          <a:lstStyle/>
-          <a:p>
-            <a:pPr algn="ctr"/>
-          </a:p>
-        </p:txBody>
-      </p:sp>
-      <p:pic>
-        <p:nvPicPr>
-          <p:cNvPr id="26" name="Picture 25" descr="image.jpg"/>
-          <p:cNvPicPr>
-            <a:picLocks noChangeAspect="1"/>
-          </p:cNvPicPr>
-          <p:nvPr/>
-        </p:nvPicPr>
-        <p:blipFill>
-          <a:blip r:embed="rId3"/>
-          <a:stretch>
-            <a:fillRect/>
-          </a:stretch>
-        </p:blipFill>
-        <p:spPr>
-          <a:xfrm>
-            <a:off x="8321040" y="6286500"/>
-            <a:ext cx="658368" cy="493776"/>
-          </a:xfrm>
-          <a:prstGeom prst="rect">
-            <a:avLst/>
-          </a:prstGeom>
-        </p:spPr>
-      </p:pic>
     </p:spTree>
   </p:cSld>
   <p:clrMapOvr>
@@ -18242,134 +17602,6 @@
           </a:p>
         </p:txBody>
       </p:sp>
-      <p:sp>
-        <p:nvSpPr>
-          <p:cNvPr id="15" name="Rounded Rectangle 14"/>
-          <p:cNvSpPr/>
-          <p:nvPr/>
-        </p:nvSpPr>
-        <p:spPr>
-          <a:gradFill rotWithShape="1">
-            <a:gsLst>
-              <a:gs pos="0">
-                <a:srgbClr val="16B9B0"/>
-              </a:gs>
-              <a:gs pos="42000">
-                <a:srgbClr val="F5C66A"/>
-              </a:gs>
-              <a:gs pos="72000">
-                <a:srgbClr val="6D7BF7"/>
-              </a:gs>
-              <a:gs pos="100000">
-                <a:srgbClr val="16B9B0"/>
-              </a:gs>
-            </a:gsLst>
-            <a:lin ang="2700000" scaled="1"/>
-          </a:gradFill>
-          <a:xfrm>
-            <a:off x="8266175" y="6245352"/>
-            <a:ext cx="768096" cy="576072"/>
-          </a:xfrm>
-          <a:prstGeom prst="roundRect">
-            <a:avLst/>
-          </a:prstGeom>
-          <a:ln w="13970">
-            <a:solidFill>
-              <a:srgbClr val="FFFFFF"/>
-            </a:solidFill>
-          </a:ln>
-        </p:spPr>
-        <p:style>
-          <a:lnRef idx="1">
-            <a:schemeClr val="accent1"/>
-          </a:lnRef>
-          <a:fillRef idx="3">
-            <a:schemeClr val="accent1"/>
-          </a:fillRef>
-          <a:effectRef idx="2">
-            <a:schemeClr val="accent1"/>
-          </a:effectRef>
-          <a:fontRef idx="minor">
-            <a:schemeClr val="lt1"/>
-          </a:fontRef>
-        </p:style>
-        <p:txBody>
-          <a:bodyPr rtlCol="0" anchor="ctr"/>
-          <a:lstStyle/>
-          <a:p>
-            <a:pPr algn="ctr"/>
-          </a:p>
-        </p:txBody>
-      </p:sp>
-      <p:sp>
-        <p:nvSpPr>
-          <p:cNvPr id="16" name="Rounded Rectangle 15"/>
-          <p:cNvSpPr/>
-          <p:nvPr/>
-        </p:nvSpPr>
-        <p:spPr>
-          <a:xfrm>
-            <a:off x="8289036" y="6268212"/>
-            <a:ext cx="722375" cy="530352"/>
-          </a:xfrm>
-          <a:prstGeom prst="roundRect">
-            <a:avLst/>
-          </a:prstGeom>
-          <a:solidFill>
-            <a:srgbClr val="F8FAFC"/>
-          </a:solidFill>
-          <a:ln w="10160">
-            <a:solidFill>
-              <a:srgbClr val="FFFFFF"/>
-            </a:solidFill>
-          </a:ln>
-        </p:spPr>
-        <p:style>
-          <a:lnRef idx="1">
-            <a:schemeClr val="accent1"/>
-          </a:lnRef>
-          <a:fillRef idx="3">
-            <a:schemeClr val="accent1"/>
-          </a:fillRef>
-          <a:effectRef idx="2">
-            <a:schemeClr val="accent1"/>
-          </a:effectRef>
-          <a:fontRef idx="minor">
-            <a:schemeClr val="lt1"/>
-          </a:fontRef>
-        </p:style>
-        <p:txBody>
-          <a:bodyPr rtlCol="0" anchor="ctr"/>
-          <a:lstStyle/>
-          <a:p>
-            <a:pPr algn="ctr"/>
-          </a:p>
-        </p:txBody>
-      </p:sp>
-      <p:pic>
-        <p:nvPicPr>
-          <p:cNvPr id="17" name="Picture 16" descr="image.jpg"/>
-          <p:cNvPicPr>
-            <a:picLocks noChangeAspect="1"/>
-          </p:cNvPicPr>
-          <p:nvPr/>
-        </p:nvPicPr>
-        <p:blipFill>
-          <a:blip r:embed="rId2"/>
-          <a:stretch>
-            <a:fillRect/>
-          </a:stretch>
-        </p:blipFill>
-        <p:spPr>
-          <a:xfrm>
-            <a:off x="8321040" y="6286500"/>
-            <a:ext cx="658368" cy="493776"/>
-          </a:xfrm>
-          <a:prstGeom prst="rect">
-            <a:avLst/>
-          </a:prstGeom>
-        </p:spPr>
-      </p:pic>
     </p:spTree>
   </p:cSld>
   <p:clrMapOvr>
@@ -19043,7 +18275,7 @@
         <p:spPr>
           <a:xfrm>
             <a:off x="749808" y="4059936"/>
-            <a:ext cx="7589520" cy="182880"/>
+            <a:ext cx="6400800" cy="182880"/>
           </a:xfrm>
           <a:prstGeom prst="rect">
             <a:avLst/>
@@ -19089,7 +18321,7 @@
         <p:spPr>
           <a:xfrm>
             <a:off x="749808" y="4306824"/>
-            <a:ext cx="7543800" cy="292608"/>
+            <a:ext cx="6355080" cy="292608"/>
           </a:xfrm>
           <a:prstGeom prst="rect">
             <a:avLst/>
@@ -19121,7 +18353,7 @@
                 </a:solidFill>
                 <a:latin typeface="Calibri"/>
               </a:rPr>
-              <a:t>Análisis y diseño orientado a objetos con UML y Rational Rose</a:t>
+              <a:t>UML con Rational Rose</a:t>
             </a:r>
           </a:p>
         </p:txBody>
@@ -19135,7 +18367,7 @@
         <p:spPr>
           <a:xfrm>
             <a:off x="749808" y="4654296"/>
-            <a:ext cx="6583680" cy="201168"/>
+            <a:ext cx="6355080" cy="201168"/>
           </a:xfrm>
           <a:prstGeom prst="rect">
             <a:avLst/>
@@ -19167,7 +18399,7 @@
                 </a:solidFill>
                 <a:latin typeface="Calibri"/>
               </a:rPr>
-              <a:t>Sergio Matsukawa · Empresa Editora Macro · 2004 · 520 p.</a:t>
+              <a:t>Gesvin Romero Moreno · Grupo Editorial Megabyte · 1.ª ed., 2004 · pp. 24–27</a:t>
             </a:r>
           </a:p>
         </p:txBody>
@@ -19182,8 +18414,8 @@
         </p:nvSpPr>
         <p:spPr>
           <a:xfrm>
-            <a:off x="6903720" y="4937760"/>
-            <a:ext cx="1417320" cy="164592"/>
+            <a:off x="749808" y="4937760"/>
+            <a:ext cx="2286000" cy="164592"/>
           </a:xfrm>
           <a:prstGeom prst="rect">
             <a:avLst/>
@@ -19222,7 +18454,7 @@
       </p:sp>
       <p:sp>
         <p:nvSpPr>
-          <p:cNvPr id="23" name="Rounded Rectangle 22"/>
+          <p:cNvPr id="22" name="Rounded Rectangle 21"/>
           <p:cNvSpPr/>
           <p:nvPr/>
         </p:nvSpPr>
@@ -19245,8 +18477,8 @@
             <a:lin ang="2700000" scaled="1"/>
           </a:gradFill>
           <a:xfrm>
-            <a:off x="8266175" y="6245352"/>
-            <a:ext cx="768096" cy="576072"/>
+            <a:off x="7370064" y="4005072"/>
+            <a:ext cx="877824" cy="1133856"/>
           </a:xfrm>
           <a:prstGeom prst="roundRect">
             <a:avLst/>
@@ -19281,14 +18513,14 @@
       </p:sp>
       <p:sp>
         <p:nvSpPr>
-          <p:cNvPr id="24" name="Rounded Rectangle 23"/>
+          <p:cNvPr id="23" name="Rounded Rectangle 22"/>
           <p:cNvSpPr/>
           <p:nvPr/>
         </p:nvSpPr>
         <p:spPr>
           <a:xfrm>
-            <a:off x="8289036" y="6268212"/>
-            <a:ext cx="722375" cy="530352"/>
+            <a:off x="7392924" y="4027932"/>
+            <a:ext cx="832103" cy="1088136"/>
           </a:xfrm>
           <a:prstGeom prst="roundRect">
             <a:avLst/>
@@ -19326,22 +18558,22 @@
       </p:sp>
       <p:pic>
         <p:nvPicPr>
-          <p:cNvPr id="25" name="Picture 24" descr="image.jpg"/>
+          <p:cNvPr id="24" name="Picture 23" descr="Páginas consultadas de UML con Rational Rose sobre diagramas de estados."/>
           <p:cNvPicPr>
             <a:picLocks noChangeAspect="1"/>
           </p:cNvPicPr>
           <p:nvPr/>
         </p:nvPicPr>
         <p:blipFill>
-          <a:blip r:embed="rId5"/>
+          <a:blip r:embed="rId6"/>
           <a:stretch>
             <a:fillRect/>
           </a:stretch>
         </p:blipFill>
         <p:spPr>
           <a:xfrm>
-            <a:off x="8321040" y="6286500"/>
-            <a:ext cx="658368" cy="493776"/>
+            <a:off x="7424927" y="4059936"/>
+            <a:ext cx="768096" cy="1024128"/>
           </a:xfrm>
           <a:prstGeom prst="rect">
             <a:avLst/>

--- a/materiales/actividad-1/tema-03-objetos-estados-v4.pptx
+++ b/materiales/actividad-1/tema-03-objetos-estados-v4.pptx
@@ -11525,8 +11525,8 @@
         </p:nvSpPr>
         <p:spPr>
           <a:xfrm>
-            <a:off x="3657600" y="402336"/>
-            <a:ext cx="5074920" cy="219456"/>
+            <a:off x="594360" y="438912"/>
+            <a:ext cx="7955279" cy="237744"/>
           </a:xfrm>
           <a:prstGeom prst="rect">
             <a:avLst/>
@@ -11535,29 +11535,14 @@
           <a:ln/>
         </p:spPr>
         <p:txBody>
-          <a:bodyPr wrap="square" anchor="t" lIns="25400" rIns="25400" tIns="25400" bIns="25400">
+          <a:bodyPr wrap="square" anchor="ctr" lIns="18288" rIns="18288" tIns="9144" bIns="9144">
             <a:spAutoFit/>
           </a:bodyPr>
           <a:lstStyle/>
           <a:p>
-            <a:pPr algn="l">
-              <a:lnSpc>
-                <a:spcPct val="100000"/>
-              </a:lnSpc>
-              <a:spcBef>
-                <a:spcPts val="0"/>
-              </a:spcBef>
-              <a:spcAft>
-                <a:spcPts val="0"/>
-              </a:spcAft>
-            </a:pPr>
+            <a:pPr algn="l"/>
             <a:r>
-              <a:rPr sz="1050" b="1" i="0">
-                <a:solidFill>
-                  <a:srgbClr val="0075A9"/>
-                </a:solidFill>
-                <a:latin typeface="Calibri"/>
-              </a:rPr>
+              <a:rPr sz="1300" b="1"/>
               <a:t>ACTIVIDAD 1 · TEMA 03</a:t>
             </a:r>
           </a:p>
@@ -11571,8 +11556,8 @@
         </p:nvSpPr>
         <p:spPr>
           <a:xfrm>
-            <a:off x="3657600" y="713232"/>
-            <a:ext cx="5074920" cy="850392"/>
+            <a:off x="594360" y="749808"/>
+            <a:ext cx="7955279" cy="658368"/>
           </a:xfrm>
           <a:prstGeom prst="rect">
             <a:avLst/>
@@ -11581,7 +11566,7 @@
           <a:ln/>
         </p:spPr>
         <p:txBody>
-          <a:bodyPr wrap="square" anchor="t" lIns="25400" rIns="25400" tIns="25400" bIns="25400">
+          <a:bodyPr wrap="square" anchor="ctr" lIns="18288" rIns="18288" tIns="9144" bIns="9144">
             <a:spAutoFit/>
           </a:bodyPr>
           <a:lstStyle/>
@@ -11598,7 +11583,7 @@
               </a:spcAft>
             </a:pPr>
             <a:r>
-              <a:rPr sz="2250" b="1" i="0">
+              <a:rPr sz="2900" b="1" i="0">
                 <a:solidFill>
                   <a:srgbClr val="1D4696"/>
                 </a:solidFill>
@@ -11617,8 +11602,8 @@
         </p:nvSpPr>
         <p:spPr>
           <a:xfrm>
-            <a:off x="3675887" y="1618488"/>
-            <a:ext cx="4983480" cy="420624"/>
+            <a:off x="594360" y="1481328"/>
+            <a:ext cx="7955279" cy="347472"/>
           </a:xfrm>
           <a:prstGeom prst="rect">
             <a:avLst/>
@@ -11627,91 +11612,21 @@
           <a:ln/>
         </p:spPr>
         <p:txBody>
-          <a:bodyPr wrap="square" anchor="t" lIns="25400" rIns="25400" tIns="25400" bIns="25400">
+          <a:bodyPr wrap="square" anchor="ctr" lIns="18288" rIns="18288" tIns="9144" bIns="9144">
             <a:spAutoFit/>
           </a:bodyPr>
           <a:lstStyle/>
           <a:p>
-            <a:pPr algn="l">
-              <a:lnSpc>
-                <a:spcPct val="100000"/>
-              </a:lnSpc>
-              <a:spcBef>
-                <a:spcPts val="0"/>
-              </a:spcBef>
-              <a:spcAft>
-                <a:spcPts val="0"/>
-              </a:spcAft>
-            </a:pPr>
+            <a:pPr algn="l"/>
             <a:r>
-              <a:rPr sz="1320" b="1" i="0">
+              <a:rPr sz="1800" b="1">
                 <a:solidFill>
-                  <a:srgbClr val="1E293B"/>
+                  <a:srgbClr val="18488B"/>
                 </a:solidFill>
-                <a:latin typeface="Calibri"/>
               </a:rPr>
-              <a:t>Sistemas de Información I</a:t>
+              <a:t>SISTEMAS DE INFORMACIÓN I</a:t>
             </a:r>
           </a:p>
-        </p:txBody>
-      </p:sp>
-      <p:sp>
-        <p:nvSpPr>
-          <p:cNvPr id="7" name="Rounded Rectangle 6"/>
-          <p:cNvSpPr/>
-          <p:nvPr/>
-        </p:nvSpPr>
-        <p:spPr>
-          <a:xfrm>
-            <a:off x="3703320" y="2148840"/>
-            <a:ext cx="4892040" cy="1353312"/>
-          </a:xfrm>
-          <a:prstGeom prst="roundRect">
-            <a:avLst>
-              <a:gd name="adj" fmla="val 8000"/>
-            </a:avLst>
-          </a:prstGeom>
-          <a:solidFill>
-            <a:srgbClr val="E7F5FA"/>
-          </a:solidFill>
-          <a:ln w="19050">
-            <a:solidFill>
-              <a:srgbClr val="0075A9"/>
-            </a:solidFill>
-          </a:ln>
-          <a:effectLst/>
-        </p:spPr>
-        <p:txBody>
-          <a:bodyPr rtlCol="0" anchor="ctr"/>
-          <a:lstStyle/>
-          <a:p>
-            <a:pPr algn="ctr"/>
-          </a:p>
-        </p:txBody>
-      </p:sp>
-      <p:sp>
-        <p:nvSpPr>
-          <p:cNvPr id="8" name="TextBox 7"/>
-          <p:cNvSpPr txBox="1"/>
-          <p:nvPr/>
-        </p:nvSpPr>
-        <p:spPr>
-          <a:xfrm>
-            <a:off x="3840480" y="2633472"/>
-            <a:ext cx="4617720" cy="310896"/>
-          </a:xfrm>
-          <a:prstGeom prst="rect">
-            <a:avLst/>
-          </a:prstGeom>
-          <a:noFill/>
-          <a:ln/>
-        </p:spPr>
-        <p:txBody>
-          <a:bodyPr wrap="square" anchor="ctr" lIns="25400" rIns="25400" tIns="25400" bIns="25400">
-            <a:spAutoFit/>
-          </a:bodyPr>
-          <a:lstStyle/>
-          <a:p/>
         </p:txBody>
       </p:sp>
       <p:sp>
@@ -11722,8 +11637,8 @@
         </p:nvSpPr>
         <p:spPr>
           <a:xfrm>
-            <a:off x="3703320" y="3630168"/>
-            <a:ext cx="4800600" cy="274320"/>
+            <a:off x="5074920" y="2148840"/>
+            <a:ext cx="3474720" cy="310896"/>
           </a:xfrm>
           <a:prstGeom prst="rect">
             <a:avLst/>
@@ -11732,29 +11647,14 @@
           <a:ln/>
         </p:spPr>
         <p:txBody>
-          <a:bodyPr wrap="square" anchor="t" lIns="25400" rIns="25400" tIns="25400" bIns="25400">
+          <a:bodyPr wrap="square" anchor="ctr" lIns="18288" rIns="18288" tIns="9144" bIns="9144">
             <a:spAutoFit/>
           </a:bodyPr>
           <a:lstStyle/>
           <a:p>
-            <a:pPr algn="l">
-              <a:lnSpc>
-                <a:spcPct val="100000"/>
-              </a:lnSpc>
-              <a:spcBef>
-                <a:spcPts val="0"/>
-              </a:spcBef>
-              <a:spcAft>
-                <a:spcPts val="0"/>
-              </a:spcAft>
-            </a:pPr>
+            <a:pPr algn="l"/>
             <a:r>
-              <a:rPr sz="1000" b="1" i="0">
-                <a:solidFill>
-                  <a:srgbClr val="0075A9"/>
-                </a:solidFill>
-                <a:latin typeface="Calibri"/>
-              </a:rPr>
+              <a:rPr sz="1600" b="1"/>
               <a:t>INTEGRANTES</a:t>
             </a:r>
           </a:p>
@@ -11768,8 +11668,8 @@
         </p:nvSpPr>
         <p:spPr>
           <a:xfrm>
-            <a:off x="3703320" y="3959352"/>
-            <a:ext cx="2286000" cy="164592"/>
+            <a:off x="5074920" y="2633472"/>
+            <a:ext cx="3566160" cy="292608"/>
           </a:xfrm>
           <a:prstGeom prst="rect">
             <a:avLst/>
@@ -11778,7 +11678,7 @@
           <a:ln/>
         </p:spPr>
         <p:txBody>
-          <a:bodyPr wrap="square" anchor="t" lIns="25400" rIns="25400" tIns="25400" bIns="25400">
+          <a:bodyPr wrap="square" anchor="ctr" lIns="18288" rIns="18288" tIns="9144" bIns="9144">
             <a:spAutoFit/>
           </a:bodyPr>
           <a:lstStyle/>
@@ -11795,7 +11695,7 @@
               </a:spcAft>
             </a:pPr>
             <a:r>
-              <a:rPr sz="830" b="1" i="0">
+              <a:rPr sz="1400" b="0" i="0">
                 <a:solidFill>
                   <a:srgbClr val="64748B"/>
                 </a:solidFill>
@@ -11814,8 +11714,8 @@
         </p:nvSpPr>
         <p:spPr>
           <a:xfrm>
-            <a:off x="6190488" y="3959352"/>
-            <a:ext cx="2286000" cy="164592"/>
+            <a:off x="5074920" y="3054096"/>
+            <a:ext cx="3566160" cy="292608"/>
           </a:xfrm>
           <a:prstGeom prst="rect">
             <a:avLst/>
@@ -11824,7 +11724,7 @@
           <a:ln/>
         </p:spPr>
         <p:txBody>
-          <a:bodyPr wrap="square" anchor="t" lIns="25400" rIns="25400" tIns="25400" bIns="25400">
+          <a:bodyPr wrap="square" anchor="ctr" lIns="18288" rIns="18288" tIns="9144" bIns="9144">
             <a:spAutoFit/>
           </a:bodyPr>
           <a:lstStyle/>
@@ -11841,7 +11741,7 @@
               </a:spcAft>
             </a:pPr>
             <a:r>
-              <a:rPr sz="830" b="1" i="0">
+              <a:rPr sz="1400" b="0" i="0">
                 <a:solidFill>
                   <a:srgbClr val="64748B"/>
                 </a:solidFill>
@@ -11860,8 +11760,8 @@
         </p:nvSpPr>
         <p:spPr>
           <a:xfrm>
-            <a:off x="3703320" y="4526280"/>
-            <a:ext cx="2286000" cy="164592"/>
+            <a:off x="5074920" y="3474720"/>
+            <a:ext cx="3566160" cy="292608"/>
           </a:xfrm>
           <a:prstGeom prst="rect">
             <a:avLst/>
@@ -11870,7 +11770,7 @@
           <a:ln/>
         </p:spPr>
         <p:txBody>
-          <a:bodyPr wrap="square" anchor="t" lIns="25400" rIns="25400" tIns="25400" bIns="25400">
+          <a:bodyPr wrap="square" anchor="ctr" lIns="18288" rIns="18288" tIns="9144" bIns="9144">
             <a:spAutoFit/>
           </a:bodyPr>
           <a:lstStyle/>
@@ -11887,7 +11787,7 @@
               </a:spcAft>
             </a:pPr>
             <a:r>
-              <a:rPr sz="830" b="1" i="0">
+              <a:rPr sz="1400" b="0" i="0">
                 <a:solidFill>
                   <a:srgbClr val="64748B"/>
                 </a:solidFill>
@@ -11906,8 +11806,8 @@
         </p:nvSpPr>
         <p:spPr>
           <a:xfrm>
-            <a:off x="6190488" y="4526280"/>
-            <a:ext cx="2286000" cy="164592"/>
+            <a:off x="5074920" y="3895344"/>
+            <a:ext cx="3566160" cy="292608"/>
           </a:xfrm>
           <a:prstGeom prst="rect">
             <a:avLst/>
@@ -11916,7 +11816,7 @@
           <a:ln/>
         </p:spPr>
         <p:txBody>
-          <a:bodyPr wrap="square" anchor="t" lIns="25400" rIns="25400" tIns="25400" bIns="25400">
+          <a:bodyPr wrap="square" anchor="ctr" lIns="18288" rIns="18288" tIns="9144" bIns="9144">
             <a:spAutoFit/>
           </a:bodyPr>
           <a:lstStyle/>
@@ -11933,7 +11833,7 @@
               </a:spcAft>
             </a:pPr>
             <a:r>
-              <a:rPr sz="830" b="1" i="0">
+              <a:rPr sz="1400" b="0" i="0">
                 <a:solidFill>
                   <a:srgbClr val="64748B"/>
                 </a:solidFill>
@@ -11952,8 +11852,8 @@
         </p:nvSpPr>
         <p:spPr>
           <a:xfrm>
-            <a:off x="3703320" y="5093208"/>
-            <a:ext cx="2286000" cy="164592"/>
+            <a:off x="5074920" y="4315968"/>
+            <a:ext cx="3566160" cy="292608"/>
           </a:xfrm>
           <a:prstGeom prst="rect">
             <a:avLst/>
@@ -11962,7 +11862,7 @@
           <a:ln/>
         </p:spPr>
         <p:txBody>
-          <a:bodyPr wrap="square" anchor="t" lIns="25400" rIns="25400" tIns="25400" bIns="25400">
+          <a:bodyPr wrap="square" anchor="ctr" lIns="18288" rIns="18288" tIns="9144" bIns="9144">
             <a:spAutoFit/>
           </a:bodyPr>
           <a:lstStyle/>
@@ -11979,7 +11879,7 @@
               </a:spcAft>
             </a:pPr>
             <a:r>
-              <a:rPr sz="830" b="1" i="0">
+              <a:rPr sz="1400" b="0" i="0">
                 <a:solidFill>
                   <a:srgbClr val="64748B"/>
                 </a:solidFill>
@@ -11998,8 +11898,8 @@
         </p:nvSpPr>
         <p:spPr>
           <a:xfrm>
-            <a:off x="3703320" y="5742432"/>
-            <a:ext cx="4754880" cy="237744"/>
+            <a:off x="594360" y="5650992"/>
+            <a:ext cx="7955279" cy="566928"/>
           </a:xfrm>
           <a:prstGeom prst="rect">
             <a:avLst/>
@@ -12008,141 +11908,26 @@
           <a:ln/>
         </p:spPr>
         <p:txBody>
-          <a:bodyPr wrap="square" anchor="t" lIns="25400" rIns="25400" tIns="25400" bIns="25400">
+          <a:bodyPr wrap="square" anchor="ctr" lIns="18288" rIns="18288" tIns="9144" bIns="9144">
             <a:spAutoFit/>
           </a:bodyPr>
           <a:lstStyle/>
           <a:p>
-            <a:pPr algn="l">
-              <a:lnSpc>
-                <a:spcPct val="100000"/>
-              </a:lnSpc>
-              <a:spcBef>
-                <a:spcPts val="0"/>
-              </a:spcBef>
-              <a:spcAft>
-                <a:spcPts val="0"/>
-              </a:spcAft>
-            </a:pPr>
+            <a:pPr algn="ctr"/>
             <a:r>
-              <a:rPr sz="919" b="0" i="0">
+              <a:rPr sz="2500" b="1">
                 <a:solidFill>
-                  <a:srgbClr val="64748B"/>
+                  <a:srgbClr val="18488B"/>
                 </a:solidFill>
-                <a:latin typeface="Calibri"/>
               </a:rPr>
-              <a:t>Universidad Privada Domingo Savio</a:t>
+              <a:t>UNIVERSIDAD PRIVADA DOMINGO SAVIO</a:t>
             </a:r>
-          </a:p>
-        </p:txBody>
-      </p:sp>
-      <p:sp>
-        <p:nvSpPr>
-          <p:cNvPr id="22" name="Rounded Rectangle 21"/>
-          <p:cNvSpPr/>
-          <p:nvPr/>
-        </p:nvSpPr>
-        <p:spPr>
-          <a:gradFill rotWithShape="1">
-            <a:gsLst>
-              <a:gs pos="0">
-                <a:srgbClr val="16B9B0"/>
-              </a:gs>
-              <a:gs pos="42000">
-                <a:srgbClr val="F5C66A"/>
-              </a:gs>
-              <a:gs pos="72000">
-                <a:srgbClr val="6D7BF7"/>
-              </a:gs>
-              <a:gs pos="100000">
-                <a:srgbClr val="16B9B0"/>
-              </a:gs>
-            </a:gsLst>
-            <a:lin ang="2700000" scaled="1"/>
-          </a:gradFill>
-          <a:xfrm>
-            <a:off x="5230368" y="2084831"/>
-            <a:ext cx="1828800" cy="1426464"/>
-          </a:xfrm>
-          <a:prstGeom prst="roundRect">
-            <a:avLst/>
-          </a:prstGeom>
-          <a:ln w="13970">
-            <a:solidFill>
-              <a:srgbClr val="FFFFFF"/>
-            </a:solidFill>
-          </a:ln>
-        </p:spPr>
-        <p:style>
-          <a:lnRef idx="1">
-            <a:schemeClr val="accent1"/>
-          </a:lnRef>
-          <a:fillRef idx="3">
-            <a:schemeClr val="accent1"/>
-          </a:fillRef>
-          <a:effectRef idx="2">
-            <a:schemeClr val="accent1"/>
-          </a:effectRef>
-          <a:fontRef idx="minor">
-            <a:schemeClr val="lt1"/>
-          </a:fontRef>
-        </p:style>
-        <p:txBody>
-          <a:bodyPr rtlCol="0" anchor="ctr"/>
-          <a:lstStyle/>
-          <a:p>
-            <a:pPr algn="ctr"/>
-          </a:p>
-        </p:txBody>
-      </p:sp>
-      <p:sp>
-        <p:nvSpPr>
-          <p:cNvPr id="23" name="Rounded Rectangle 22"/>
-          <p:cNvSpPr/>
-          <p:nvPr/>
-        </p:nvSpPr>
-        <p:spPr>
-          <a:xfrm>
-            <a:off x="5253228" y="2107692"/>
-            <a:ext cx="1783080" cy="1380744"/>
-          </a:xfrm>
-          <a:prstGeom prst="roundRect">
-            <a:avLst/>
-          </a:prstGeom>
-          <a:solidFill>
-            <a:srgbClr val="F8FAFC"/>
-          </a:solidFill>
-          <a:ln w="10160">
-            <a:solidFill>
-              <a:srgbClr val="FFFFFF"/>
-            </a:solidFill>
-          </a:ln>
-        </p:spPr>
-        <p:style>
-          <a:lnRef idx="1">
-            <a:schemeClr val="accent1"/>
-          </a:lnRef>
-          <a:fillRef idx="3">
-            <a:schemeClr val="accent1"/>
-          </a:fillRef>
-          <a:effectRef idx="2">
-            <a:schemeClr val="accent1"/>
-          </a:effectRef>
-          <a:fontRef idx="minor">
-            <a:schemeClr val="lt1"/>
-          </a:fontRef>
-        </p:style>
-        <p:txBody>
-          <a:bodyPr rtlCol="0" anchor="ctr"/>
-          <a:lstStyle/>
-          <a:p>
-            <a:pPr algn="ctr"/>
           </a:p>
         </p:txBody>
       </p:sp>
       <p:pic>
         <p:nvPicPr>
-          <p:cNvPr id="21" name="Picture 20" descr="foto-grupal.jpeg"/>
+          <p:cNvPr id="21" name="Foto grupal · orientación corregida" descr="image.jpg"/>
           <p:cNvPicPr>
             <a:picLocks noChangeAspect="1"/>
           </p:cNvPicPr>
@@ -12155,9 +11940,9 @@
           </a:stretch>
         </p:blipFill>
         <p:spPr>
-          <a:xfrm>
-            <a:off x="5340096" y="2139696"/>
-            <a:ext cx="1609344" cy="1207008"/>
+          <a:xfrm rot="16200000">
+            <a:off x="1108710" y="1680210"/>
+            <a:ext cx="3086100" cy="4114800"/>
           </a:xfrm>
           <a:prstGeom prst="rect">
             <a:avLst/>
@@ -17849,25 +17634,8 @@
           </a:bodyPr>
           <a:lstStyle/>
           <a:p>
-            <a:pPr algn="l">
-              <a:lnSpc>
-                <a:spcPct val="100000"/>
-              </a:lnSpc>
-              <a:spcBef>
-                <a:spcPts val="0"/>
-              </a:spcBef>
-              <a:spcAft>
-                <a:spcPts val="0"/>
-              </a:spcAft>
-            </a:pPr>
             <a:r>
-              <a:rPr sz="869" b="1" i="0">
-                <a:solidFill>
-                  <a:srgbClr val="0075A9"/>
-                </a:solidFill>
-                <a:latin typeface="Calibri"/>
-              </a:rPr>
-              <a:t>DIGITAL · LIBRO 1</a:t>
+              <a:t>DIGITAL · BIBLIOTECA UCB</a:t>
             </a:r>
           </a:p>
         </p:txBody>
@@ -18069,25 +17837,8 @@
           </a:bodyPr>
           <a:lstStyle/>
           <a:p>
-            <a:pPr algn="l">
-              <a:lnSpc>
-                <a:spcPct val="100000"/>
-              </a:lnSpc>
-              <a:spcBef>
-                <a:spcPts val="0"/>
-              </a:spcBef>
-              <a:spcAft>
-                <a:spcPts val="0"/>
-              </a:spcAft>
-            </a:pPr>
             <a:r>
-              <a:rPr sz="869" b="1" i="0">
-                <a:solidFill>
-                  <a:srgbClr val="0075A9"/>
-                </a:solidFill>
-                <a:latin typeface="Calibri"/>
-              </a:rPr>
-              <a:t>DIGITAL · LIBRO 2</a:t>
+              <a:t>DIGITAL · BIBLIOTECA UCB</a:t>
             </a:r>
           </a:p>
         </p:txBody>
@@ -18241,7 +17992,7 @@
         <p:spPr>
           <a:xfrm>
             <a:off x="566928" y="3950208"/>
-            <a:ext cx="8010144" cy="1261872"/>
+            <a:ext cx="8010144" cy="1645920"/>
           </a:xfrm>
           <a:prstGeom prst="roundRect">
             <a:avLst>
@@ -18289,25 +18040,8 @@
           </a:bodyPr>
           <a:lstStyle/>
           <a:p>
-            <a:pPr algn="l">
-              <a:lnSpc>
-                <a:spcPct val="100000"/>
-              </a:lnSpc>
-              <a:spcBef>
-                <a:spcPts val="0"/>
-              </a:spcBef>
-              <a:spcAft>
-                <a:spcPts val="0"/>
-              </a:spcAft>
-            </a:pPr>
             <a:r>
-              <a:rPr sz="869" b="1" i="0">
-                <a:solidFill>
-                  <a:srgbClr val="0075A9"/>
-                </a:solidFill>
-                <a:latin typeface="Calibri"/>
-              </a:rPr>
-              <a:t>IMPRESO · LIBRO 3</a:t>
+              <a:t>IMPRESO · EJEMPLAR CONSULTADO</a:t>
             </a:r>
           </a:p>
         </p:txBody>
@@ -18452,128 +18186,24 @@
           </a:p>
         </p:txBody>
       </p:sp>
-      <p:sp>
-        <p:nvSpPr>
-          <p:cNvPr id="22" name="Rounded Rectangle 21"/>
-          <p:cNvSpPr/>
-          <p:nvPr/>
-        </p:nvSpPr>
-        <p:spPr>
-          <a:gradFill rotWithShape="1">
-            <a:gsLst>
-              <a:gs pos="0">
-                <a:srgbClr val="16B9B0"/>
-              </a:gs>
-              <a:gs pos="42000">
-                <a:srgbClr val="F5C66A"/>
-              </a:gs>
-              <a:gs pos="72000">
-                <a:srgbClr val="6D7BF7"/>
-              </a:gs>
-              <a:gs pos="100000">
-                <a:srgbClr val="16B9B0"/>
-              </a:gs>
-            </a:gsLst>
-            <a:lin ang="2700000" scaled="1"/>
-          </a:gradFill>
-          <a:xfrm>
-            <a:off x="7370064" y="4005072"/>
-            <a:ext cx="877824" cy="1133856"/>
-          </a:xfrm>
-          <a:prstGeom prst="roundRect">
-            <a:avLst/>
-          </a:prstGeom>
-          <a:ln w="13970">
-            <a:solidFill>
-              <a:srgbClr val="FFFFFF"/>
-            </a:solidFill>
-          </a:ln>
-        </p:spPr>
-        <p:style>
-          <a:lnRef idx="1">
-            <a:schemeClr val="accent1"/>
-          </a:lnRef>
-          <a:fillRef idx="3">
-            <a:schemeClr val="accent1"/>
-          </a:fillRef>
-          <a:effectRef idx="2">
-            <a:schemeClr val="accent1"/>
-          </a:effectRef>
-          <a:fontRef idx="minor">
-            <a:schemeClr val="lt1"/>
-          </a:fontRef>
-        </p:style>
-        <p:txBody>
-          <a:bodyPr rtlCol="0" anchor="ctr"/>
-          <a:lstStyle/>
-          <a:p>
-            <a:pPr algn="ctr"/>
-          </a:p>
-        </p:txBody>
-      </p:sp>
-      <p:sp>
-        <p:nvSpPr>
-          <p:cNvPr id="23" name="Rounded Rectangle 22"/>
-          <p:cNvSpPr/>
-          <p:nvPr/>
-        </p:nvSpPr>
-        <p:spPr>
-          <a:xfrm>
-            <a:off x="7392924" y="4027932"/>
-            <a:ext cx="832103" cy="1088136"/>
-          </a:xfrm>
-          <a:prstGeom prst="roundRect">
-            <a:avLst/>
-          </a:prstGeom>
-          <a:solidFill>
-            <a:srgbClr val="F8FAFC"/>
-          </a:solidFill>
-          <a:ln w="10160">
-            <a:solidFill>
-              <a:srgbClr val="FFFFFF"/>
-            </a:solidFill>
-          </a:ln>
-        </p:spPr>
-        <p:style>
-          <a:lnRef idx="1">
-            <a:schemeClr val="accent1"/>
-          </a:lnRef>
-          <a:fillRef idx="3">
-            <a:schemeClr val="accent1"/>
-          </a:fillRef>
-          <a:effectRef idx="2">
-            <a:schemeClr val="accent1"/>
-          </a:effectRef>
-          <a:fontRef idx="minor">
-            <a:schemeClr val="lt1"/>
-          </a:fontRef>
-        </p:style>
-        <p:txBody>
-          <a:bodyPr rtlCol="0" anchor="ctr"/>
-          <a:lstStyle/>
-          <a:p>
-            <a:pPr algn="ctr"/>
-          </a:p>
-        </p:txBody>
-      </p:sp>
       <p:pic>
         <p:nvPicPr>
-          <p:cNvPr id="24" name="Picture 23" descr="Páginas consultadas de UML con Rational Rose sobre diagramas de estados."/>
+          <p:cNvPr id="22" name="Foto del libro impreso · tema 03" descr="tema-01-romero-portada.jpeg"/>
           <p:cNvPicPr>
             <a:picLocks noChangeAspect="1"/>
           </p:cNvPicPr>
           <p:nvPr/>
         </p:nvPicPr>
         <p:blipFill>
-          <a:blip r:embed="rId6"/>
+          <a:blip r:embed="rId7"/>
           <a:stretch>
             <a:fillRect/>
           </a:stretch>
         </p:blipFill>
         <p:spPr>
           <a:xfrm>
-            <a:off x="7424927" y="4059936"/>
-            <a:ext cx="768096" cy="1024128"/>
+            <a:off x="7150608" y="4014215"/>
+            <a:ext cx="1097280" cy="1463040"/>
           </a:xfrm>
           <a:prstGeom prst="rect">
             <a:avLst/>

--- a/materiales/actividad-1/tema-03-objetos-estados-v4.pptx
+++ b/materiales/actividad-1/tema-03-objetos-estados-v4.pptx
@@ -11525,8 +11525,8 @@
         </p:nvSpPr>
         <p:spPr>
           <a:xfrm>
-            <a:off x="594360" y="438912"/>
-            <a:ext cx="7955279" cy="237744"/>
+            <a:off x="2743200" y="438912"/>
+            <a:ext cx="5989320" cy="256032"/>
           </a:xfrm>
           <a:prstGeom prst="rect">
             <a:avLst/>
@@ -11542,7 +11542,11 @@
           <a:p>
             <a:pPr algn="l"/>
             <a:r>
-              <a:rPr sz="1300" b="1"/>
+              <a:rPr sz="1300" b="1">
+                <a:solidFill>
+                  <a:srgbClr val="22303C"/>
+                </a:solidFill>
+              </a:rPr>
               <a:t>ACTIVIDAD 1 · TEMA 03</a:t>
             </a:r>
           </a:p>
@@ -11556,8 +11560,8 @@
         </p:nvSpPr>
         <p:spPr>
           <a:xfrm>
-            <a:off x="594360" y="749808"/>
-            <a:ext cx="7955279" cy="658368"/>
+            <a:off x="2743200" y="768096"/>
+            <a:ext cx="5989320" cy="658368"/>
           </a:xfrm>
           <a:prstGeom prst="rect">
             <a:avLst/>
@@ -11585,7 +11589,7 @@
             <a:r>
               <a:rPr sz="2900" b="1" i="0">
                 <a:solidFill>
-                  <a:srgbClr val="1D4696"/>
+                  <a:srgbClr val="22303C"/>
                 </a:solidFill>
                 <a:latin typeface="Calibri Light"/>
               </a:rPr>
@@ -11602,8 +11606,8 @@
         </p:nvSpPr>
         <p:spPr>
           <a:xfrm>
-            <a:off x="594360" y="1481328"/>
-            <a:ext cx="7955279" cy="347472"/>
+            <a:off x="2743200" y="1490472"/>
+            <a:ext cx="5989320" cy="347472"/>
           </a:xfrm>
           <a:prstGeom prst="rect">
             <a:avLst/>
@@ -11621,7 +11625,7 @@
             <a:r>
               <a:rPr sz="1800" b="1">
                 <a:solidFill>
-                  <a:srgbClr val="18488B"/>
+                  <a:srgbClr val="22303C"/>
                 </a:solidFill>
               </a:rPr>
               <a:t>SISTEMAS DE INFORMACIÓN I</a:t>
@@ -11898,8 +11902,8 @@
         </p:nvSpPr>
         <p:spPr>
           <a:xfrm>
-            <a:off x="594360" y="5650992"/>
-            <a:ext cx="7955279" cy="566928"/>
+            <a:off x="2743200" y="5623560"/>
+            <a:ext cx="5989320" cy="566928"/>
           </a:xfrm>
           <a:prstGeom prst="rect">
             <a:avLst/>
@@ -11915,9 +11919,9 @@
           <a:p>
             <a:pPr algn="ctr"/>
             <a:r>
-              <a:rPr sz="2500" b="1">
+              <a:rPr sz="2000" b="1">
                 <a:solidFill>
-                  <a:srgbClr val="18488B"/>
+                  <a:srgbClr val="22303C"/>
                 </a:solidFill>
               </a:rPr>
               <a:t>UNIVERSIDAD PRIVADA DOMINGO SAVIO</a:t>
@@ -11940,7 +11944,7 @@
           </a:stretch>
         </p:blipFill>
         <p:spPr>
-          <a:xfrm rot="16200000">
+          <a:xfrm rot="5400000">
             <a:off x="1108710" y="1680210"/>
             <a:ext cx="3086100" cy="4114800"/>
           </a:xfrm>
